--- a/lecons/F5/35_F5_M3_L30_Spatial_Distribution_of_the_World_s_Population.pptx
+++ b/lecons/F5/35_F5_M3_L30_Spatial_Distribution_of_the_World_s_Population.pptx
@@ -13154,7 +13154,7 @@
               <a:buNone/>
             </a:pPr>
             <a:r>
-              <a:rPr lang="en-US" sz="4000" b="1" dirty="0">
+              <a:rPr lang="en-US" sz="3200" b="1" dirty="0">
                 <a:solidFill>
                   <a:srgbClr val="111111"/>
                 </a:solidFill>
@@ -13164,7 +13164,7 @@
               </a:rPr>
               <a:t>Topic: The Dynamics of Population and Implications</a:t>
             </a:r>
-            <a:endParaRPr lang="en-US" sz="4000" dirty="0"/>
+            <a:endParaRPr lang="en-US" sz="3200" dirty="0"/>
           </a:p>
           <a:p>
             <a:pPr algn="l" indent="0" marL="0">
@@ -13174,7 +13174,7 @@
               <a:buNone/>
             </a:pPr>
             <a:r>
-              <a:rPr lang="en-US" sz="4000" b="1" dirty="0">
+              <a:rPr lang="en-US" sz="3200" b="1" dirty="0">
                 <a:solidFill>
                   <a:srgbClr val="111111"/>
                 </a:solidFill>
@@ -13184,7 +13184,7 @@
               </a:rPr>
               <a:t>Sub-topic: Population and Population Distribution</a:t>
             </a:r>
-            <a:endParaRPr lang="en-US" sz="4000" dirty="0"/>
+            <a:endParaRPr lang="en-US" sz="3200" dirty="0"/>
           </a:p>
           <a:p>
             <a:pPr algn="l" indent="0" marL="0">
@@ -13194,7 +13194,7 @@
               <a:buNone/>
             </a:pPr>
             <a:r>
-              <a:rPr lang="en-US" sz="4000" b="1" dirty="0">
+              <a:rPr lang="en-US" sz="3200" b="1" dirty="0">
                 <a:solidFill>
                   <a:srgbClr val="990011"/>
                 </a:solidFill>
@@ -13204,7 +13204,7 @@
               </a:rPr>
               <a:t>Lesson 30: Spatial Distribution of the World's Population</a:t>
             </a:r>
-            <a:endParaRPr lang="en-US" sz="4000" dirty="0"/>
+            <a:endParaRPr lang="en-US" sz="3200" dirty="0"/>
           </a:p>
         </p:txBody>
       </p:sp>

--- a/lecons/F5/35_F5_M3_L30_Spatial_Distribution_of_the_World_s_Population.pptx
+++ b/lecons/F5/35_F5_M3_L30_Spatial_Distribution_of_the_World_s_Population.pptx
@@ -55,9 +55,12 @@
     <p:sldId id="303" r:id="rId49"/>
     <p:sldId id="304" r:id="rId50"/>
     <p:sldId id="305" r:id="rId51"/>
+    <p:sldId id="306" r:id="rId52"/>
+    <p:sldId id="307" r:id="rId53"/>
+    <p:sldId id="308" r:id="rId54"/>
   </p:sldIdLst>
   <p:notesMasterIdLst>
-    <p:notesMasterId r:id="rId52"/>
+    <p:notesMasterId r:id="rId55"/>
   </p:notesMasterIdLst>
   <p:sldSz cx="12192000" cy="6858000"/>
   <p:notesSz cx="6858000" cy="12192000"/>
@@ -3191,7 +3194,7 @@
           <a:p>
             <a:r>
               <a:rPr lang="en-US" dirty="0"/>
-              <a:t>Let us copy Major Areas of Dense, Moderate and Sparse Population. The main population areas are the following. On this slide we have Dense areas and Moderate areas. Write each point on a new line, with the key term first, and explain it in your own words when we revise. When you finish, we go to the next slide.</a:t>
+              <a:t>Let us copy The Areas. The main population areas are the following. On this slide we have Dense areas and Moderate areas. Write each point on a new line, with the key term first, and explain it in your own words when we revise. When you finish, we go to the next slide.</a:t>
             </a:r>
             <a:endParaRPr lang="en-US" dirty="0"/>
           </a:p>
@@ -3279,7 +3282,7 @@
           <a:p>
             <a:r>
               <a:rPr lang="en-US" dirty="0"/>
-              <a:t>We continue with Major Areas of Dense, Moderate and Sparse Population. On this slide we have Sparse areas and Reasons. Write each point on a new line, with the key term first, and explain it in your own words when we revise.</a:t>
+              <a:t>We continue with The Areas. On this slide we have Sparse areas. Write each point on a new line, with the key term first, and explain it in your own words when we revise.</a:t>
             </a:r>
             <a:endParaRPr lang="en-US" dirty="0"/>
           </a:p>
@@ -3367,7 +3370,7 @@
           <a:p>
             <a:r>
               <a:rPr lang="en-US" dirty="0"/>
-              <a:t>Now let us check what you have understood. Question 1: Name two dense and two sparse areas of the world. Answer in your exercise book.</a:t>
+              <a:t>Let us copy Reasons. This pattern is explained by the following factors. On this slide we have Relief. Write each point on a new line, with the key term first, and explain it in your own words when we revise. When you finish, we go to the next slide.</a:t>
             </a:r>
             <a:endParaRPr lang="en-US" dirty="0"/>
           </a:p>
@@ -3543,7 +3546,7 @@
           <a:p>
             <a:r>
               <a:rPr lang="en-US" dirty="0"/>
-              <a:t>The expected answer is: east Asia and Western Europe; the Sahara and Siberia. If you got it right, well done.</a:t>
+              <a:t>We continue with Reasons. On this slide we have Climate and Soils and water. Write each point on a new line, with the key term first, and explain it in your own words when we revise. When you finish, we go to the next slide.</a:t>
             </a:r>
             <a:endParaRPr lang="en-US" dirty="0"/>
           </a:p>
@@ -3631,7 +3634,7 @@
           <a:p>
             <a:r>
               <a:rPr lang="en-US" dirty="0"/>
-              <a:t>Now let us check what you have understood. Question 2: Give one reason for a sparse area. Answer in your exercise book.</a:t>
+              <a:t>We continue with Reasons. On this slide we have Resources and history. Write each point on a new line, with the key term first, and explain it in your own words when we revise.</a:t>
             </a:r>
             <a:endParaRPr lang="en-US" dirty="0"/>
           </a:p>
@@ -3719,7 +3722,7 @@
           <a:p>
             <a:r>
               <a:rPr lang="en-US" dirty="0"/>
-              <a:t>The expected answer is: an extreme climate (hot or cold deserts). If you got it right, well done.</a:t>
+              <a:t>Now let us check what you have understood. Question 1: Name two dense and two sparse areas of the world. Answer in your exercise book.</a:t>
             </a:r>
             <a:endParaRPr lang="en-US" dirty="0"/>
           </a:p>
@@ -3807,7 +3810,7 @@
           <a:p>
             <a:r>
               <a:rPr lang="en-US" dirty="0"/>
-              <a:t>For those who need more practice, fill in the blanks in your exercise book. The answers are: number 1, Asia; number 2, sparse; number 3, Northern.</a:t>
+              <a:t>The expected answer is: east Asia and Western Europe; the Sahara and Siberia. If you got it right, well done.</a:t>
             </a:r>
             <a:endParaRPr lang="en-US" dirty="0"/>
           </a:p>
@@ -3895,7 +3898,7 @@
           <a:p>
             <a:r>
               <a:rPr lang="en-US" dirty="0"/>
-              <a:t>For your homework: Draw a sketch map of the world showing three dense and three sparse areas. We shall correct it at the beginning of our next lesson.</a:t>
+              <a:t>Now let us check what you have understood. Question 2: Give one reason for a sparse area. Answer in your exercise book.</a:t>
             </a:r>
             <a:endParaRPr lang="en-US" dirty="0"/>
           </a:p>
@@ -3983,7 +3986,7 @@
           <a:p>
             <a:r>
               <a:rPr lang="en-US" dirty="0"/>
-              <a:t>Our next lesson will be on Lesson 31: Age Composition of Population. Thank you for your attention, and see you next time.</a:t>
+              <a:t>The expected answer is: an extreme climate (hot or cold deserts). If you got it right, well done.</a:t>
             </a:r>
             <a:endParaRPr lang="en-US" dirty="0"/>
           </a:p>
@@ -4071,7 +4074,7 @@
           <a:p>
             <a:r>
               <a:rPr lang="en-US" dirty="0"/>
-              <a:t>Let us play the bilingual game. I say a word in English, and you give me the French word. Then we do the reverse.</a:t>
+              <a:t>For those who need more practice, fill in the blanks in your exercise book. The answers are: number 1, Asia; number 2, sparse; number 3, Northern.</a:t>
             </a:r>
             <a:endParaRPr lang="en-US" dirty="0"/>
           </a:p>
@@ -4159,7 +4162,7 @@
           <a:p>
             <a:r>
               <a:rPr lang="en-US" dirty="0"/>
-              <a:t>I record this information in the official logbook of the class after the lesson.</a:t>
+              <a:t>For your homework: Draw a sketch map of the world showing three dense and three sparse areas. We shall correct it at the beginning of our next lesson.</a:t>
             </a:r>
             <a:endParaRPr lang="en-US" dirty="0"/>
           </a:p>
@@ -4247,7 +4250,7 @@
           <a:p>
             <a:r>
               <a:rPr lang="en-US" dirty="0"/>
-              <a:t>I complete the second page of the logbook: the matter taught, the evaluation, the homework and the attendance.</a:t>
+              <a:t>Our next lesson will be on Lesson 31: Age Composition of Population. Thank you for your attention, and see you next time.</a:t>
             </a:r>
             <a:endParaRPr lang="en-US" dirty="0"/>
           </a:p>
@@ -4335,7 +4338,7 @@
           <a:p>
             <a:r>
               <a:rPr lang="en-US" dirty="0"/>
-              <a:t>This slide is for me, the teacher: it gives the timing of the lesson and what to do if the projector is not available.</a:t>
+              <a:t>Let us play the bilingual game. I say a word in English, and you give me the French word. Then we do the reverse.</a:t>
             </a:r>
             <a:endParaRPr lang="en-US" dirty="0"/>
           </a:p>
@@ -4511,7 +4514,7 @@
           <a:p>
             <a:r>
               <a:rPr lang="en-US" dirty="0"/>
-              <a:t>These are the references and picture credits used to prepare this lesson.</a:t>
+              <a:t>I record this information in the official logbook of the class after the lesson.</a:t>
             </a:r>
             <a:endParaRPr lang="en-US" dirty="0"/>
           </a:p>
@@ -4535,6 +4538,270 @@
             <a:fld id="{F7021451-1387-4CA6-816F-3879F97B5CBC}" type="slidenum">
               <a:rPr lang="en-US"/>
               <a:t>50</a:t>
+            </a:fld>
+            <a:endParaRPr lang="en-US"/>
+          </a:p>
+        </p:txBody>
+      </p:sp>
+    </p:spTree>
+    <p:extLst>
+      <p:ext uri="{BB962C8B-B14F-4D97-AF65-F5344CB8AC3E}">
+        <p14:creationId xmlns:p14="http://schemas.microsoft.com/office/powerpoint/2010/main" val="1024086991"/>
+      </p:ext>
+    </p:extLst>
+  </p:cSld>
+  <p:clrMapOvr>
+    <a:masterClrMapping/>
+  </p:clrMapOvr>
+</p:notes>
+</file>
+
+<file path=ppt/notesSlides/notesSlide51.xml><?xml version="1.0" encoding="utf-8"?>
+<p:notes xmlns:a="http://schemas.openxmlformats.org/drawingml/2006/main" xmlns:r="http://schemas.openxmlformats.org/officeDocument/2006/relationships" xmlns:p="http://schemas.openxmlformats.org/presentationml/2006/main">
+  <p:cSld>
+    <p:spTree>
+      <p:nvGrpSpPr>
+        <p:cNvPr id="1" name=""/>
+        <p:cNvGrpSpPr/>
+        <p:nvPr/>
+      </p:nvGrpSpPr>
+      <p:grpSpPr>
+        <a:xfrm>
+          <a:off x="0" y="0"/>
+          <a:ext cx="0" cy="0"/>
+          <a:chOff x="0" y="0"/>
+          <a:chExt cx="0" cy="0"/>
+        </a:xfrm>
+      </p:grpSpPr>
+      <p:sp>
+        <p:nvSpPr>
+          <p:cNvPr id="2" name="Slide Image Placeholder 1"/>
+          <p:cNvSpPr>
+            <a:spLocks noGrp="1" noRot="1" noChangeAspect="1"/>
+          </p:cNvSpPr>
+          <p:nvPr>
+            <p:ph type="sldImg"/>
+          </p:nvPr>
+        </p:nvSpPr>
+        <p:spPr/>
+      </p:sp>
+      <p:sp>
+        <p:nvSpPr>
+          <p:cNvPr id="3" name="Notes Placeholder 2"/>
+          <p:cNvSpPr>
+            <a:spLocks noGrp="1"/>
+          </p:cNvSpPr>
+          <p:nvPr>
+            <p:ph type="body" idx="1"/>
+          </p:nvPr>
+        </p:nvSpPr>
+        <p:spPr/>
+        <p:txBody>
+          <a:bodyPr/>
+          <a:lstStyle/>
+          <a:p>
+            <a:r>
+              <a:rPr lang="en-US" dirty="0"/>
+              <a:t>I complete the second page of the logbook: the matter taught, the evaluation, the homework and the attendance.</a:t>
+            </a:r>
+            <a:endParaRPr lang="en-US" dirty="0"/>
+          </a:p>
+        </p:txBody>
+      </p:sp>
+      <p:sp>
+        <p:nvSpPr>
+          <p:cNvPr id="4" name="Slide Number Placeholder 3"/>
+          <p:cNvSpPr>
+            <a:spLocks noGrp="1"/>
+          </p:cNvSpPr>
+          <p:nvPr>
+            <p:ph type="sldNum" sz="quarter" idx="10"/>
+          </p:nvPr>
+        </p:nvSpPr>
+        <p:spPr/>
+        <p:txBody>
+          <a:bodyPr/>
+          <a:lstStyle/>
+          <a:p>
+            <a:fld id="{F7021451-1387-4CA6-816F-3879F97B5CBC}" type="slidenum">
+              <a:rPr lang="en-US"/>
+              <a:t>51</a:t>
+            </a:fld>
+            <a:endParaRPr lang="en-US"/>
+          </a:p>
+        </p:txBody>
+      </p:sp>
+    </p:spTree>
+    <p:extLst>
+      <p:ext uri="{BB962C8B-B14F-4D97-AF65-F5344CB8AC3E}">
+        <p14:creationId xmlns:p14="http://schemas.microsoft.com/office/powerpoint/2010/main" val="1024086991"/>
+      </p:ext>
+    </p:extLst>
+  </p:cSld>
+  <p:clrMapOvr>
+    <a:masterClrMapping/>
+  </p:clrMapOvr>
+</p:notes>
+</file>
+
+<file path=ppt/notesSlides/notesSlide52.xml><?xml version="1.0" encoding="utf-8"?>
+<p:notes xmlns:a="http://schemas.openxmlformats.org/drawingml/2006/main" xmlns:r="http://schemas.openxmlformats.org/officeDocument/2006/relationships" xmlns:p="http://schemas.openxmlformats.org/presentationml/2006/main">
+  <p:cSld>
+    <p:spTree>
+      <p:nvGrpSpPr>
+        <p:cNvPr id="1" name=""/>
+        <p:cNvGrpSpPr/>
+        <p:nvPr/>
+      </p:nvGrpSpPr>
+      <p:grpSpPr>
+        <a:xfrm>
+          <a:off x="0" y="0"/>
+          <a:ext cx="0" cy="0"/>
+          <a:chOff x="0" y="0"/>
+          <a:chExt cx="0" cy="0"/>
+        </a:xfrm>
+      </p:grpSpPr>
+      <p:sp>
+        <p:nvSpPr>
+          <p:cNvPr id="2" name="Slide Image Placeholder 1"/>
+          <p:cNvSpPr>
+            <a:spLocks noGrp="1" noRot="1" noChangeAspect="1"/>
+          </p:cNvSpPr>
+          <p:nvPr>
+            <p:ph type="sldImg"/>
+          </p:nvPr>
+        </p:nvSpPr>
+        <p:spPr/>
+      </p:sp>
+      <p:sp>
+        <p:nvSpPr>
+          <p:cNvPr id="3" name="Notes Placeholder 2"/>
+          <p:cNvSpPr>
+            <a:spLocks noGrp="1"/>
+          </p:cNvSpPr>
+          <p:nvPr>
+            <p:ph type="body" idx="1"/>
+          </p:nvPr>
+        </p:nvSpPr>
+        <p:spPr/>
+        <p:txBody>
+          <a:bodyPr/>
+          <a:lstStyle/>
+          <a:p>
+            <a:r>
+              <a:rPr lang="en-US" dirty="0"/>
+              <a:t>This slide is for me, the teacher: it gives the timing of the lesson and what to do if the projector is not available.</a:t>
+            </a:r>
+            <a:endParaRPr lang="en-US" dirty="0"/>
+          </a:p>
+        </p:txBody>
+      </p:sp>
+      <p:sp>
+        <p:nvSpPr>
+          <p:cNvPr id="4" name="Slide Number Placeholder 3"/>
+          <p:cNvSpPr>
+            <a:spLocks noGrp="1"/>
+          </p:cNvSpPr>
+          <p:nvPr>
+            <p:ph type="sldNum" sz="quarter" idx="10"/>
+          </p:nvPr>
+        </p:nvSpPr>
+        <p:spPr/>
+        <p:txBody>
+          <a:bodyPr/>
+          <a:lstStyle/>
+          <a:p>
+            <a:fld id="{F7021451-1387-4CA6-816F-3879F97B5CBC}" type="slidenum">
+              <a:rPr lang="en-US"/>
+              <a:t>52</a:t>
+            </a:fld>
+            <a:endParaRPr lang="en-US"/>
+          </a:p>
+        </p:txBody>
+      </p:sp>
+    </p:spTree>
+    <p:extLst>
+      <p:ext uri="{BB962C8B-B14F-4D97-AF65-F5344CB8AC3E}">
+        <p14:creationId xmlns:p14="http://schemas.microsoft.com/office/powerpoint/2010/main" val="1024086991"/>
+      </p:ext>
+    </p:extLst>
+  </p:cSld>
+  <p:clrMapOvr>
+    <a:masterClrMapping/>
+  </p:clrMapOvr>
+</p:notes>
+</file>
+
+<file path=ppt/notesSlides/notesSlide53.xml><?xml version="1.0" encoding="utf-8"?>
+<p:notes xmlns:a="http://schemas.openxmlformats.org/drawingml/2006/main" xmlns:r="http://schemas.openxmlformats.org/officeDocument/2006/relationships" xmlns:p="http://schemas.openxmlformats.org/presentationml/2006/main">
+  <p:cSld>
+    <p:spTree>
+      <p:nvGrpSpPr>
+        <p:cNvPr id="1" name=""/>
+        <p:cNvGrpSpPr/>
+        <p:nvPr/>
+      </p:nvGrpSpPr>
+      <p:grpSpPr>
+        <a:xfrm>
+          <a:off x="0" y="0"/>
+          <a:ext cx="0" cy="0"/>
+          <a:chOff x="0" y="0"/>
+          <a:chExt cx="0" cy="0"/>
+        </a:xfrm>
+      </p:grpSpPr>
+      <p:sp>
+        <p:nvSpPr>
+          <p:cNvPr id="2" name="Slide Image Placeholder 1"/>
+          <p:cNvSpPr>
+            <a:spLocks noGrp="1" noRot="1" noChangeAspect="1"/>
+          </p:cNvSpPr>
+          <p:nvPr>
+            <p:ph type="sldImg"/>
+          </p:nvPr>
+        </p:nvSpPr>
+        <p:spPr/>
+      </p:sp>
+      <p:sp>
+        <p:nvSpPr>
+          <p:cNvPr id="3" name="Notes Placeholder 2"/>
+          <p:cNvSpPr>
+            <a:spLocks noGrp="1"/>
+          </p:cNvSpPr>
+          <p:nvPr>
+            <p:ph type="body" idx="1"/>
+          </p:nvPr>
+        </p:nvSpPr>
+        <p:spPr/>
+        <p:txBody>
+          <a:bodyPr/>
+          <a:lstStyle/>
+          <a:p>
+            <a:r>
+              <a:rPr lang="en-US" dirty="0"/>
+              <a:t>These are the references and picture credits used to prepare this lesson.</a:t>
+            </a:r>
+            <a:endParaRPr lang="en-US" dirty="0"/>
+          </a:p>
+        </p:txBody>
+      </p:sp>
+      <p:sp>
+        <p:nvSpPr>
+          <p:cNvPr id="4" name="Slide Number Placeholder 3"/>
+          <p:cNvSpPr>
+            <a:spLocks noGrp="1"/>
+          </p:cNvSpPr>
+          <p:nvPr>
+            <p:ph type="sldNum" sz="quarter" idx="10"/>
+          </p:nvPr>
+        </p:nvSpPr>
+        <p:spPr/>
+        <p:txBody>
+          <a:bodyPr/>
+          <a:lstStyle/>
+          <a:p>
+            <a:fld id="{F7021451-1387-4CA6-816F-3879F97B5CBC}" type="slidenum">
+              <a:rPr lang="en-US"/>
+              <a:t>53</a:t>
             </a:fld>
             <a:endParaRPr lang="en-US"/>
           </a:p>
@@ -13844,7 +14111,7 @@
         <p:spPr>
           <a:xfrm>
             <a:off x="0" y="658368"/>
-            <a:ext cx="2468880" cy="5833872"/>
+            <a:ext cx="1463040" cy="5833872"/>
           </a:xfrm>
           <a:prstGeom prst="rect">
             <a:avLst/>
@@ -13859,8 +14126,8 @@
         </p:nvSpPr>
         <p:spPr>
           <a:xfrm>
-            <a:off x="2697480" y="1005840"/>
-            <a:ext cx="9174175" cy="731520"/>
+            <a:off x="1691640" y="1005840"/>
+            <a:ext cx="10180015" cy="731520"/>
           </a:xfrm>
           <a:prstGeom prst="rect">
             <a:avLst/>
@@ -13900,8 +14167,47 @@
         </p:nvSpPr>
         <p:spPr>
           <a:xfrm>
-            <a:off x="2697480" y="1783080"/>
-            <a:ext cx="9174175" cy="4663440"/>
+            <a:off x="1691640" y="1737360"/>
+            <a:ext cx="10180015" cy="457200"/>
+          </a:xfrm>
+          <a:prstGeom prst="rect">
+            <a:avLst/>
+          </a:prstGeom>
+          <a:noFill/>
+          <a:ln/>
+        </p:spPr>
+        <p:txBody>
+          <a:bodyPr wrap="square" lIns="0" tIns="0" rIns="0" bIns="0" rtlCol="0" anchor="ctr"/>
+          <a:lstStyle/>
+          <a:p>
+            <a:pPr algn="l" indent="0" marL="0">
+              <a:buNone/>
+            </a:pPr>
+            <a:r>
+              <a:rPr lang="en-US" sz="3200" b="1" dirty="0">
+                <a:solidFill>
+                  <a:srgbClr val="990011"/>
+                </a:solidFill>
+                <a:latin typeface="Times New Roman" pitchFamily="34" charset="0"/>
+                <a:ea typeface="Times New Roman" pitchFamily="34" charset="-122"/>
+                <a:cs typeface="Times New Roman" pitchFamily="34" charset="-120"/>
+              </a:rPr>
+              <a:t>A) The Areas</a:t>
+            </a:r>
+            <a:endParaRPr lang="en-US" sz="3200" dirty="0"/>
+          </a:p>
+        </p:txBody>
+      </p:sp>
+      <p:sp>
+        <p:nvSpPr>
+          <p:cNvPr id="6" name="Text 3"/>
+          <p:cNvSpPr/>
+          <p:nvPr/>
+        </p:nvSpPr>
+        <p:spPr>
+          <a:xfrm>
+            <a:off x="1691640" y="2240280"/>
+            <a:ext cx="10180015" cy="4206240"/>
           </a:xfrm>
           <a:prstGeom prst="rect">
             <a:avLst/>
@@ -14179,7 +14485,7 @@
                 <a:ea typeface="Times New Roman" pitchFamily="34" charset="-122"/>
                 <a:cs typeface="Times New Roman" pitchFamily="34" charset="-120"/>
               </a:rPr>
-              <a:t>2. Major Areas of Dense, Moderate and Sparse Population (continued)</a:t>
+              <a:t>2. Major Areas of Dense, Moderate and Sparse Population</a:t>
             </a:r>
             <a:endParaRPr lang="en-US" sz="3600" dirty="0"/>
           </a:p>
@@ -14193,8 +14499,47 @@
         </p:nvSpPr>
         <p:spPr>
           <a:xfrm>
-            <a:off x="5349240" y="1783080"/>
-            <a:ext cx="6522415" cy="4663440"/>
+            <a:off x="5349240" y="1737360"/>
+            <a:ext cx="6522415" cy="457200"/>
+          </a:xfrm>
+          <a:prstGeom prst="rect">
+            <a:avLst/>
+          </a:prstGeom>
+          <a:noFill/>
+          <a:ln/>
+        </p:spPr>
+        <p:txBody>
+          <a:bodyPr wrap="square" lIns="0" tIns="0" rIns="0" bIns="0" rtlCol="0" anchor="ctr"/>
+          <a:lstStyle/>
+          <a:p>
+            <a:pPr algn="l" indent="0" marL="0">
+              <a:buNone/>
+            </a:pPr>
+            <a:r>
+              <a:rPr lang="en-US" sz="3200" b="1" dirty="0">
+                <a:solidFill>
+                  <a:srgbClr val="990011"/>
+                </a:solidFill>
+                <a:latin typeface="Times New Roman" pitchFamily="34" charset="0"/>
+                <a:ea typeface="Times New Roman" pitchFamily="34" charset="-122"/>
+                <a:cs typeface="Times New Roman" pitchFamily="34" charset="-120"/>
+              </a:rPr>
+              <a:t>A) The Areas (continued)</a:t>
+            </a:r>
+            <a:endParaRPr lang="en-US" sz="3200" dirty="0"/>
+          </a:p>
+        </p:txBody>
+      </p:sp>
+      <p:sp>
+        <p:nvSpPr>
+          <p:cNvPr id="6" name="Text 3"/>
+          <p:cNvSpPr/>
+          <p:nvPr/>
+        </p:nvSpPr>
+        <p:spPr>
+          <a:xfrm>
+            <a:off x="5349240" y="2240280"/>
+            <a:ext cx="6522415" cy="4206240"/>
           </a:xfrm>
           <a:prstGeom prst="rect">
             <a:avLst/>
@@ -14239,43 +14584,6 @@
                 <a:cs typeface="Times New Roman" pitchFamily="34" charset="-120"/>
               </a:rPr>
               <a:t>Hot deserts, polar lands, equatorial forests and high mountains are sparse.</a:t>
-            </a:r>
-            <a:endParaRPr lang="en-US" sz="4000" dirty="0"/>
-          </a:p>
-          <a:p>
-            <a:pPr algn="l" indent="0" marL="0">
-              <a:spcAft>
-                <a:spcPts val="800"/>
-              </a:spcAft>
-              <a:buNone/>
-            </a:pPr>
-            <a:r>
-              <a:rPr lang="en-US" sz="4000" b="1" dirty="0">
-                <a:solidFill>
-                  <a:srgbClr val="111111"/>
-                </a:solidFill>
-                <a:latin typeface="Times New Roman" pitchFamily="34" charset="0"/>
-                <a:ea typeface="Times New Roman" pitchFamily="34" charset="-122"/>
-                <a:cs typeface="Times New Roman" pitchFamily="34" charset="-120"/>
-              </a:rPr>
-              <a:t>Reasons: </a:t>
-            </a:r>
-            <a:pPr algn="l" indent="0" marL="0">
-              <a:spcAft>
-                <a:spcPts val="800"/>
-              </a:spcAft>
-              <a:buNone/>
-            </a:pPr>
-            <a:r>
-              <a:rPr lang="en-US" sz="4000" dirty="0">
-                <a:solidFill>
-                  <a:srgbClr val="111111"/>
-                </a:solidFill>
-                <a:latin typeface="Times New Roman" pitchFamily="34" charset="0"/>
-                <a:ea typeface="Times New Roman" pitchFamily="34" charset="-122"/>
-                <a:cs typeface="Times New Roman" pitchFamily="34" charset="-120"/>
-              </a:rPr>
-              <a:t>Relief, climate, soils, water, resources and history explain the pattern.</a:t>
             </a:r>
             <a:endParaRPr lang="en-US" sz="4000" dirty="0"/>
           </a:p>
@@ -14387,7 +14695,7 @@
                 <a:ea typeface="Calibri" pitchFamily="34" charset="-122"/>
                 <a:cs typeface="Calibri" pitchFamily="34" charset="-120"/>
               </a:rPr>
-              <a:t>FORMATIVE EVALUATION</a:t>
+              <a:t>BOARD SUMMARY</a:t>
             </a:r>
             <a:endParaRPr lang="en-US" sz="1400" dirty="0"/>
           </a:p>
@@ -14452,7 +14760,7 @@
                 <a:ea typeface="Times New Roman" pitchFamily="34" charset="-122"/>
                 <a:cs typeface="Times New Roman" pitchFamily="34" charset="-120"/>
               </a:rPr>
-              <a:t>Evaluation 1</a:t>
+              <a:t>2. Major Areas of Dense, Moderate and Sparse Population</a:t>
             </a:r>
             <a:endParaRPr lang="en-US" sz="3600" dirty="0"/>
           </a:p>
@@ -14466,8 +14774,47 @@
         </p:nvSpPr>
         <p:spPr>
           <a:xfrm>
-            <a:off x="5349240" y="1783080"/>
-            <a:ext cx="6522415" cy="4663440"/>
+            <a:off x="5349240" y="1737360"/>
+            <a:ext cx="6522415" cy="457200"/>
+          </a:xfrm>
+          <a:prstGeom prst="rect">
+            <a:avLst/>
+          </a:prstGeom>
+          <a:noFill/>
+          <a:ln/>
+        </p:spPr>
+        <p:txBody>
+          <a:bodyPr wrap="square" lIns="0" tIns="0" rIns="0" bIns="0" rtlCol="0" anchor="ctr"/>
+          <a:lstStyle/>
+          <a:p>
+            <a:pPr algn="l" indent="0" marL="0">
+              <a:buNone/>
+            </a:pPr>
+            <a:r>
+              <a:rPr lang="en-US" sz="3200" b="1" dirty="0">
+                <a:solidFill>
+                  <a:srgbClr val="990011"/>
+                </a:solidFill>
+                <a:latin typeface="Times New Roman" pitchFamily="34" charset="0"/>
+                <a:ea typeface="Times New Roman" pitchFamily="34" charset="-122"/>
+                <a:cs typeface="Times New Roman" pitchFamily="34" charset="-120"/>
+              </a:rPr>
+              <a:t>B) Reasons</a:t>
+            </a:r>
+            <a:endParaRPr lang="en-US" sz="3200" dirty="0"/>
+          </a:p>
+        </p:txBody>
+      </p:sp>
+      <p:sp>
+        <p:nvSpPr>
+          <p:cNvPr id="6" name="Text 3"/>
+          <p:cNvSpPr/>
+          <p:nvPr/>
+        </p:nvSpPr>
+        <p:spPr>
+          <a:xfrm>
+            <a:off x="5349240" y="2240280"/>
+            <a:ext cx="6522415" cy="4206240"/>
           </a:xfrm>
           <a:prstGeom prst="rect">
             <a:avLst/>
@@ -14486,7 +14833,7 @@
               <a:buNone/>
             </a:pPr>
             <a:r>
-              <a:rPr lang="en-US" sz="4000" dirty="0">
+              <a:rPr lang="en-US" sz="4000" i="1" dirty="0">
                 <a:solidFill>
                   <a:srgbClr val="111111"/>
                 </a:solidFill>
@@ -14494,7 +14841,44 @@
                 <a:ea typeface="Times New Roman" pitchFamily="34" charset="-122"/>
                 <a:cs typeface="Times New Roman" pitchFamily="34" charset="-120"/>
               </a:rPr>
-              <a:t>Name two dense and two sparse areas of the world.</a:t>
+              <a:t>This pattern is explained by the following factors:</a:t>
+            </a:r>
+            <a:endParaRPr lang="en-US" sz="4000" dirty="0"/>
+          </a:p>
+          <a:p>
+            <a:pPr algn="l" indent="0" marL="0">
+              <a:spcAft>
+                <a:spcPts val="800"/>
+              </a:spcAft>
+              <a:buNone/>
+            </a:pPr>
+            <a:r>
+              <a:rPr lang="en-US" sz="4000" b="1" dirty="0">
+                <a:solidFill>
+                  <a:srgbClr val="111111"/>
+                </a:solidFill>
+                <a:latin typeface="Times New Roman" pitchFamily="34" charset="0"/>
+                <a:ea typeface="Times New Roman" pitchFamily="34" charset="-122"/>
+                <a:cs typeface="Times New Roman" pitchFamily="34" charset="-120"/>
+              </a:rPr>
+              <a:t>Relief: </a:t>
+            </a:r>
+            <a:pPr algn="l" indent="0" marL="0">
+              <a:spcAft>
+                <a:spcPts val="800"/>
+              </a:spcAft>
+              <a:buNone/>
+            </a:pPr>
+            <a:r>
+              <a:rPr lang="en-US" sz="4000" dirty="0">
+                <a:solidFill>
+                  <a:srgbClr val="111111"/>
+                </a:solidFill>
+                <a:latin typeface="Times New Roman" pitchFamily="34" charset="0"/>
+                <a:ea typeface="Times New Roman" pitchFamily="34" charset="-122"/>
+                <a:cs typeface="Times New Roman" pitchFamily="34" charset="-120"/>
+              </a:rPr>
+              <a:t>Plains attract people, while high mountains repel them.</a:t>
             </a:r>
             <a:endParaRPr lang="en-US" sz="4000" dirty="0"/>
           </a:p>
@@ -14845,7 +15229,7 @@
                 <a:ea typeface="Calibri" pitchFamily="34" charset="-122"/>
                 <a:cs typeface="Calibri" pitchFamily="34" charset="-120"/>
               </a:rPr>
-              <a:t>FORMATIVE EVALUATION</a:t>
+              <a:t>BOARD SUMMARY</a:t>
             </a:r>
             <a:endParaRPr lang="en-US" sz="1400" dirty="0"/>
           </a:p>
@@ -14868,7 +15252,7 @@
         <p:spPr>
           <a:xfrm>
             <a:off x="0" y="658368"/>
-            <a:ext cx="5120640" cy="5833872"/>
+            <a:ext cx="3840480" cy="5833872"/>
           </a:xfrm>
           <a:prstGeom prst="rect">
             <a:avLst/>
@@ -14883,8 +15267,8 @@
         </p:nvSpPr>
         <p:spPr>
           <a:xfrm>
-            <a:off x="5349240" y="1005840"/>
-            <a:ext cx="6522415" cy="731520"/>
+            <a:off x="4069080" y="1005840"/>
+            <a:ext cx="7802575" cy="731520"/>
           </a:xfrm>
           <a:prstGeom prst="rect">
             <a:avLst/>
@@ -14910,7 +15294,7 @@
                 <a:ea typeface="Times New Roman" pitchFamily="34" charset="-122"/>
                 <a:cs typeface="Times New Roman" pitchFamily="34" charset="-120"/>
               </a:rPr>
-              <a:t>Expected Answer</a:t>
+              <a:t>2. Major Areas of Dense, Moderate and Sparse Population</a:t>
             </a:r>
             <a:endParaRPr lang="en-US" sz="3600" dirty="0"/>
           </a:p>
@@ -14924,8 +15308,47 @@
         </p:nvSpPr>
         <p:spPr>
           <a:xfrm>
-            <a:off x="5349240" y="1783080"/>
-            <a:ext cx="6522415" cy="4663440"/>
+            <a:off x="4069080" y="1737360"/>
+            <a:ext cx="7802575" cy="457200"/>
+          </a:xfrm>
+          <a:prstGeom prst="rect">
+            <a:avLst/>
+          </a:prstGeom>
+          <a:noFill/>
+          <a:ln/>
+        </p:spPr>
+        <p:txBody>
+          <a:bodyPr wrap="square" lIns="0" tIns="0" rIns="0" bIns="0" rtlCol="0" anchor="ctr"/>
+          <a:lstStyle/>
+          <a:p>
+            <a:pPr algn="l" indent="0" marL="0">
+              <a:buNone/>
+            </a:pPr>
+            <a:r>
+              <a:rPr lang="en-US" sz="3200" b="1" dirty="0">
+                <a:solidFill>
+                  <a:srgbClr val="990011"/>
+                </a:solidFill>
+                <a:latin typeface="Times New Roman" pitchFamily="34" charset="0"/>
+                <a:ea typeface="Times New Roman" pitchFamily="34" charset="-122"/>
+                <a:cs typeface="Times New Roman" pitchFamily="34" charset="-120"/>
+              </a:rPr>
+              <a:t>B) Reasons (continued)</a:t>
+            </a:r>
+            <a:endParaRPr lang="en-US" sz="3200" dirty="0"/>
+          </a:p>
+        </p:txBody>
+      </p:sp>
+      <p:sp>
+        <p:nvSpPr>
+          <p:cNvPr id="6" name="Text 3"/>
+          <p:cNvSpPr/>
+          <p:nvPr/>
+        </p:nvSpPr>
+        <p:spPr>
+          <a:xfrm>
+            <a:off x="4069080" y="2240280"/>
+            <a:ext cx="7802575" cy="4206240"/>
           </a:xfrm>
           <a:prstGeom prst="rect">
             <a:avLst/>
@@ -14944,7 +15367,7 @@
               <a:buNone/>
             </a:pPr>
             <a:r>
-              <a:rPr lang="en-US" sz="4000" dirty="0">
+              <a:rPr lang="en-US" sz="4000" b="1" dirty="0">
                 <a:solidFill>
                   <a:srgbClr val="111111"/>
                 </a:solidFill>
@@ -14952,7 +15375,61 @@
                 <a:ea typeface="Times New Roman" pitchFamily="34" charset="-122"/>
                 <a:cs typeface="Times New Roman" pitchFamily="34" charset="-120"/>
               </a:rPr>
-              <a:t>East Asia and Western Europe; the Sahara and Siberia.</a:t>
+              <a:t>Climate: </a:t>
+            </a:r>
+            <a:pPr algn="l" indent="0" marL="0">
+              <a:spcAft>
+                <a:spcPts val="800"/>
+              </a:spcAft>
+              <a:buNone/>
+            </a:pPr>
+            <a:r>
+              <a:rPr lang="en-US" sz="4000" dirty="0">
+                <a:solidFill>
+                  <a:srgbClr val="111111"/>
+                </a:solidFill>
+                <a:latin typeface="Times New Roman" pitchFamily="34" charset="0"/>
+                <a:ea typeface="Times New Roman" pitchFamily="34" charset="-122"/>
+                <a:cs typeface="Times New Roman" pitchFamily="34" charset="-120"/>
+              </a:rPr>
+              <a:t>Moderate climates attract people, while very hot, cold or dry climates repel them.</a:t>
+            </a:r>
+            <a:endParaRPr lang="en-US" sz="4000" dirty="0"/>
+          </a:p>
+          <a:p>
+            <a:pPr algn="l" indent="0" marL="0">
+              <a:spcAft>
+                <a:spcPts val="800"/>
+              </a:spcAft>
+              <a:buNone/>
+            </a:pPr>
+            <a:r>
+              <a:rPr lang="en-US" sz="4000" b="1" dirty="0">
+                <a:solidFill>
+                  <a:srgbClr val="111111"/>
+                </a:solidFill>
+                <a:latin typeface="Times New Roman" pitchFamily="34" charset="0"/>
+                <a:ea typeface="Times New Roman" pitchFamily="34" charset="-122"/>
+                <a:cs typeface="Times New Roman" pitchFamily="34" charset="-120"/>
+              </a:rPr>
+              <a:t>Soils and water: </a:t>
+            </a:r>
+            <a:pPr algn="l" indent="0" marL="0">
+              <a:spcAft>
+                <a:spcPts val="800"/>
+              </a:spcAft>
+              <a:buNone/>
+            </a:pPr>
+            <a:r>
+              <a:rPr lang="en-US" sz="4000" dirty="0">
+                <a:solidFill>
+                  <a:srgbClr val="111111"/>
+                </a:solidFill>
+                <a:latin typeface="Times New Roman" pitchFamily="34" charset="0"/>
+                <a:ea typeface="Times New Roman" pitchFamily="34" charset="-122"/>
+                <a:cs typeface="Times New Roman" pitchFamily="34" charset="-120"/>
+              </a:rPr>
+              <a:t>Fertile soils and rivers attract farmers.</a:t>
             </a:r>
             <a:endParaRPr lang="en-US" sz="4000" dirty="0"/>
           </a:p>
@@ -15064,7 +15541,7 @@
                 <a:ea typeface="Calibri" pitchFamily="34" charset="-122"/>
                 <a:cs typeface="Calibri" pitchFamily="34" charset="-120"/>
               </a:rPr>
-              <a:t>FORMATIVE EVALUATION</a:t>
+              <a:t>BOARD SUMMARY</a:t>
             </a:r>
             <a:endParaRPr lang="en-US" sz="1400" dirty="0"/>
           </a:p>
@@ -15129,7 +15606,7 @@
                 <a:ea typeface="Times New Roman" pitchFamily="34" charset="-122"/>
                 <a:cs typeface="Times New Roman" pitchFamily="34" charset="-120"/>
               </a:rPr>
-              <a:t>Evaluation 2</a:t>
+              <a:t>2. Major Areas of Dense, Moderate and Sparse Population</a:t>
             </a:r>
             <a:endParaRPr lang="en-US" sz="3600" dirty="0"/>
           </a:p>
@@ -15143,8 +15620,47 @@
         </p:nvSpPr>
         <p:spPr>
           <a:xfrm>
-            <a:off x="5349240" y="1783080"/>
-            <a:ext cx="6522415" cy="4663440"/>
+            <a:off x="5349240" y="1737360"/>
+            <a:ext cx="6522415" cy="457200"/>
+          </a:xfrm>
+          <a:prstGeom prst="rect">
+            <a:avLst/>
+          </a:prstGeom>
+          <a:noFill/>
+          <a:ln/>
+        </p:spPr>
+        <p:txBody>
+          <a:bodyPr wrap="square" lIns="0" tIns="0" rIns="0" bIns="0" rtlCol="0" anchor="ctr"/>
+          <a:lstStyle/>
+          <a:p>
+            <a:pPr algn="l" indent="0" marL="0">
+              <a:buNone/>
+            </a:pPr>
+            <a:r>
+              <a:rPr lang="en-US" sz="3200" b="1" dirty="0">
+                <a:solidFill>
+                  <a:srgbClr val="990011"/>
+                </a:solidFill>
+                <a:latin typeface="Times New Roman" pitchFamily="34" charset="0"/>
+                <a:ea typeface="Times New Roman" pitchFamily="34" charset="-122"/>
+                <a:cs typeface="Times New Roman" pitchFamily="34" charset="-120"/>
+              </a:rPr>
+              <a:t>B) Reasons (continued)</a:t>
+            </a:r>
+            <a:endParaRPr lang="en-US" sz="3200" dirty="0"/>
+          </a:p>
+        </p:txBody>
+      </p:sp>
+      <p:sp>
+        <p:nvSpPr>
+          <p:cNvPr id="6" name="Text 3"/>
+          <p:cNvSpPr/>
+          <p:nvPr/>
+        </p:nvSpPr>
+        <p:spPr>
+          <a:xfrm>
+            <a:off x="5349240" y="2240280"/>
+            <a:ext cx="6522415" cy="4206240"/>
           </a:xfrm>
           <a:prstGeom prst="rect">
             <a:avLst/>
@@ -15163,7 +15679,7 @@
               <a:buNone/>
             </a:pPr>
             <a:r>
-              <a:rPr lang="en-US" sz="4000" dirty="0">
+              <a:rPr lang="en-US" sz="4000" b="1" dirty="0">
                 <a:solidFill>
                   <a:srgbClr val="111111"/>
                 </a:solidFill>
@@ -15171,7 +15687,24 @@
                 <a:ea typeface="Times New Roman" pitchFamily="34" charset="-122"/>
                 <a:cs typeface="Times New Roman" pitchFamily="34" charset="-120"/>
               </a:rPr>
-              <a:t>Give one reason for a sparse area.</a:t>
+              <a:t>Resources and history: </a:t>
+            </a:r>
+            <a:pPr algn="l" indent="0" marL="0">
+              <a:spcAft>
+                <a:spcPts val="800"/>
+              </a:spcAft>
+              <a:buNone/>
+            </a:pPr>
+            <a:r>
+              <a:rPr lang="en-US" sz="4000" dirty="0">
+                <a:solidFill>
+                  <a:srgbClr val="111111"/>
+                </a:solidFill>
+                <a:latin typeface="Times New Roman" pitchFamily="34" charset="0"/>
+                <a:ea typeface="Times New Roman" pitchFamily="34" charset="-122"/>
+                <a:cs typeface="Times New Roman" pitchFamily="34" charset="-120"/>
+              </a:rPr>
+              <a:t>Mines, industries and old civilisations created dense areas.</a:t>
             </a:r>
             <a:endParaRPr lang="en-US" sz="4000" dirty="0"/>
           </a:p>
@@ -15348,7 +15881,7 @@
                 <a:ea typeface="Times New Roman" pitchFamily="34" charset="-122"/>
                 <a:cs typeface="Times New Roman" pitchFamily="34" charset="-120"/>
               </a:rPr>
-              <a:t>Expected Answer</a:t>
+              <a:t>Evaluation 1</a:t>
             </a:r>
             <a:endParaRPr lang="en-US" sz="3600" dirty="0"/>
           </a:p>
@@ -15390,7 +15923,7 @@
                 <a:ea typeface="Times New Roman" pitchFamily="34" charset="-122"/>
                 <a:cs typeface="Times New Roman" pitchFamily="34" charset="-120"/>
               </a:rPr>
-              <a:t>An extreme climate (hot or cold deserts).</a:t>
+              <a:t>Name two dense and two sparse areas of the world.</a:t>
             </a:r>
             <a:endParaRPr lang="en-US" sz="4000" dirty="0"/>
           </a:p>
@@ -15502,7 +16035,7 @@
                 <a:ea typeface="Calibri" pitchFamily="34" charset="-122"/>
                 <a:cs typeface="Calibri" pitchFamily="34" charset="-120"/>
               </a:rPr>
-              <a:t>REMEDIATION</a:t>
+              <a:t>FORMATIVE EVALUATION</a:t>
             </a:r>
             <a:endParaRPr lang="en-US" sz="1400" dirty="0"/>
           </a:p>
@@ -15525,7 +16058,7 @@
         <p:spPr>
           <a:xfrm>
             <a:off x="0" y="658368"/>
-            <a:ext cx="3840480" cy="5833872"/>
+            <a:ext cx="5120640" cy="5833872"/>
           </a:xfrm>
           <a:prstGeom prst="rect">
             <a:avLst/>
@@ -15540,8 +16073,8 @@
         </p:nvSpPr>
         <p:spPr>
           <a:xfrm>
-            <a:off x="4069080" y="1005840"/>
-            <a:ext cx="7802575" cy="731520"/>
+            <a:off x="5349240" y="1005840"/>
+            <a:ext cx="6522415" cy="731520"/>
           </a:xfrm>
           <a:prstGeom prst="rect">
             <a:avLst/>
@@ -15567,7 +16100,7 @@
                 <a:ea typeface="Times New Roman" pitchFamily="34" charset="-122"/>
                 <a:cs typeface="Times New Roman" pitchFamily="34" charset="-120"/>
               </a:rPr>
-              <a:t>Remediation</a:t>
+              <a:t>Expected Answer</a:t>
             </a:r>
             <a:endParaRPr lang="en-US" sz="3600" dirty="0"/>
           </a:p>
@@ -15581,8 +16114,8 @@
         </p:nvSpPr>
         <p:spPr>
           <a:xfrm>
-            <a:off x="4069080" y="1783080"/>
-            <a:ext cx="7802575" cy="4663440"/>
+            <a:off x="5349240" y="1783080"/>
+            <a:ext cx="6522415" cy="4663440"/>
           </a:xfrm>
           <a:prstGeom prst="rect">
             <a:avLst/>
@@ -15601,7 +16134,7 @@
               <a:buNone/>
             </a:pPr>
             <a:r>
-              <a:rPr lang="en-US" sz="4000" b="1" dirty="0">
+              <a:rPr lang="en-US" sz="4000" dirty="0">
                 <a:solidFill>
                   <a:srgbClr val="111111"/>
                 </a:solidFill>
@@ -15609,73 +16142,7 @@
                 <a:ea typeface="Times New Roman" pitchFamily="34" charset="-122"/>
                 <a:cs typeface="Times New Roman" pitchFamily="34" charset="-120"/>
               </a:rPr>
-              <a:t>Fill in the blanks:</a:t>
-            </a:r>
-            <a:endParaRPr lang="en-US" sz="4000" dirty="0"/>
-          </a:p>
-          <a:p>
-            <a:pPr algn="l" marL="342900" indent="-342900">
-              <a:spcAft>
-                <a:spcPts val="800"/>
-              </a:spcAft>
-              <a:buSzPct val="100000"/>
-              <a:buFont typeface="+mj-lt"/>
-              <a:buAutoNum type="arabicPeriod" startAt="1"/>
-            </a:pPr>
-            <a:r>
-              <a:rPr lang="en-US" sz="4000" dirty="0">
-                <a:solidFill>
-                  <a:srgbClr val="111111"/>
-                </a:solidFill>
-                <a:latin typeface="Times New Roman" pitchFamily="34" charset="0"/>
-                <a:ea typeface="Times New Roman" pitchFamily="34" charset="-122"/>
-                <a:cs typeface="Times New Roman" pitchFamily="34" charset="-120"/>
-              </a:rPr>
-              <a:t>The most populated continent is ______.</a:t>
-            </a:r>
-            <a:endParaRPr lang="en-US" sz="4000" dirty="0"/>
-          </a:p>
-          <a:p>
-            <a:pPr algn="l" marL="342900" indent="-342900">
-              <a:spcAft>
-                <a:spcPts val="800"/>
-              </a:spcAft>
-              <a:buSzPct val="100000"/>
-              <a:buFont typeface="+mj-lt"/>
-              <a:buAutoNum type="arabicPeriod" startAt="1"/>
-            </a:pPr>
-            <a:r>
-              <a:rPr lang="en-US" sz="4000" dirty="0">
-                <a:solidFill>
-                  <a:srgbClr val="111111"/>
-                </a:solidFill>
-                <a:latin typeface="Times New Roman" pitchFamily="34" charset="0"/>
-                <a:ea typeface="Times New Roman" pitchFamily="34" charset="-122"/>
-                <a:cs typeface="Times New Roman" pitchFamily="34" charset="-120"/>
-              </a:rPr>
-              <a:t>The Sahara is a ______ area.</a:t>
-            </a:r>
-            <a:endParaRPr lang="en-US" sz="4000" dirty="0"/>
-          </a:p>
-          <a:p>
-            <a:pPr algn="l" marL="342900" indent="-342900">
-              <a:spcAft>
-                <a:spcPts val="800"/>
-              </a:spcAft>
-              <a:buSzPct val="100000"/>
-              <a:buFont typeface="+mj-lt"/>
-              <a:buAutoNum type="arabicPeriod" startAt="1"/>
-            </a:pPr>
-            <a:r>
-              <a:rPr lang="en-US" sz="4000" dirty="0">
-                <a:solidFill>
-                  <a:srgbClr val="111111"/>
-                </a:solidFill>
-                <a:latin typeface="Times New Roman" pitchFamily="34" charset="0"/>
-                <a:ea typeface="Times New Roman" pitchFamily="34" charset="-122"/>
-                <a:cs typeface="Times New Roman" pitchFamily="34" charset="-120"/>
-              </a:rPr>
-              <a:t>Most people live in the ______ Hemisphere.</a:t>
+              <a:t>East Asia and Western Europe; the Sahara and Siberia.</a:t>
             </a:r>
             <a:endParaRPr lang="en-US" sz="4000" dirty="0"/>
           </a:p>
@@ -15787,7 +16254,7 @@
                 <a:ea typeface="Calibri" pitchFamily="34" charset="-122"/>
                 <a:cs typeface="Calibri" pitchFamily="34" charset="-120"/>
               </a:rPr>
-              <a:t>HOMEWORK</a:t>
+              <a:t>FORMATIVE EVALUATION</a:t>
             </a:r>
             <a:endParaRPr lang="en-US" sz="1400" dirty="0"/>
           </a:p>
@@ -15852,7 +16319,7 @@
                 <a:ea typeface="Times New Roman" pitchFamily="34" charset="-122"/>
                 <a:cs typeface="Times New Roman" pitchFamily="34" charset="-120"/>
               </a:rPr>
-              <a:t>Homework</a:t>
+              <a:t>Evaluation 2</a:t>
             </a:r>
             <a:endParaRPr lang="en-US" sz="3600" dirty="0"/>
           </a:p>
@@ -15894,7 +16361,7 @@
                 <a:ea typeface="Times New Roman" pitchFamily="34" charset="-122"/>
                 <a:cs typeface="Times New Roman" pitchFamily="34" charset="-120"/>
               </a:rPr>
-              <a:t>Draw a sketch map of the world showing three dense and three sparse areas.</a:t>
+              <a:t>Give one reason for a sparse area.</a:t>
             </a:r>
             <a:endParaRPr lang="en-US" sz="4000" dirty="0"/>
           </a:p>
@@ -16006,7 +16473,7 @@
                 <a:ea typeface="Calibri" pitchFamily="34" charset="-122"/>
                 <a:cs typeface="Calibri" pitchFamily="34" charset="-120"/>
               </a:rPr>
-              <a:t>NEXT LESSON</a:t>
+              <a:t>FORMATIVE EVALUATION</a:t>
             </a:r>
             <a:endParaRPr lang="en-US" sz="1400" dirty="0"/>
           </a:p>
@@ -16071,7 +16538,7 @@
                 <a:ea typeface="Times New Roman" pitchFamily="34" charset="-122"/>
                 <a:cs typeface="Times New Roman" pitchFamily="34" charset="-120"/>
               </a:rPr>
-              <a:t>Next Lesson</a:t>
+              <a:t>Expected Answer</a:t>
             </a:r>
             <a:endParaRPr lang="en-US" sz="3600" dirty="0"/>
           </a:p>
@@ -16095,17 +16562,17 @@
           <a:ln/>
         </p:spPr>
         <p:txBody>
-          <a:bodyPr wrap="square" lIns="0" tIns="0" rIns="0" bIns="0" rtlCol="0" anchor="ctr"/>
-          <a:lstStyle/>
-          <a:p>
-            <a:pPr algn="ctr" indent="0" marL="0">
+          <a:bodyPr wrap="square" lIns="0" tIns="0" rIns="0" bIns="0" rtlCol="0" anchor="t"/>
+          <a:lstStyle/>
+          <a:p>
+            <a:pPr algn="l" indent="0" marL="0">
               <a:spcAft>
                 <a:spcPts val="800"/>
               </a:spcAft>
               <a:buNone/>
             </a:pPr>
             <a:r>
-              <a:rPr lang="en-US" sz="4000" b="1" dirty="0">
+              <a:rPr lang="en-US" sz="4000" dirty="0">
                 <a:solidFill>
                   <a:srgbClr val="111111"/>
                 </a:solidFill>
@@ -16113,27 +16580,7 @@
                 <a:ea typeface="Times New Roman" pitchFamily="34" charset="-122"/>
                 <a:cs typeface="Times New Roman" pitchFamily="34" charset="-120"/>
               </a:rPr>
-              <a:t>Our next lesson will be on:</a:t>
-            </a:r>
-            <a:endParaRPr lang="en-US" sz="4000" dirty="0"/>
-          </a:p>
-          <a:p>
-            <a:pPr algn="ctr" indent="0" marL="0">
-              <a:spcAft>
-                <a:spcPts val="800"/>
-              </a:spcAft>
-              <a:buNone/>
-            </a:pPr>
-            <a:r>
-              <a:rPr lang="en-US" sz="4000" b="1" dirty="0">
-                <a:solidFill>
-                  <a:srgbClr val="990011"/>
-                </a:solidFill>
-                <a:latin typeface="Times New Roman" pitchFamily="34" charset="0"/>
-                <a:ea typeface="Times New Roman" pitchFamily="34" charset="-122"/>
-                <a:cs typeface="Times New Roman" pitchFamily="34" charset="-120"/>
-              </a:rPr>
-              <a:t>Lesson 31: Age Composition of Population</a:t>
+              <a:t>An extreme climate (hot or cold deserts).</a:t>
             </a:r>
             <a:endParaRPr lang="en-US" sz="4000" dirty="0"/>
           </a:p>
@@ -16245,6 +16692,749 @@
                 <a:ea typeface="Calibri" pitchFamily="34" charset="-122"/>
                 <a:cs typeface="Calibri" pitchFamily="34" charset="-120"/>
               </a:rPr>
+              <a:t>REMEDIATION</a:t>
+            </a:r>
+            <a:endParaRPr lang="en-US" sz="1400" dirty="0"/>
+          </a:p>
+        </p:txBody>
+      </p:sp>
+      <p:pic>
+        <p:nvPicPr>
+          <p:cNvPr id="3" name="Image 0" descr="/home/claude/f4/img/minesec_sheet.png">    </p:cNvPr>
+          <p:cNvPicPr>
+            <a:picLocks noChangeAspect="1"/>
+          </p:cNvPicPr>
+          <p:nvPr/>
+        </p:nvPicPr>
+        <p:blipFill>
+          <a:blip r:embed="rId1"/>
+          <a:stretch>
+            <a:fillRect/>
+          </a:stretch>
+        </p:blipFill>
+        <p:spPr>
+          <a:xfrm>
+            <a:off x="0" y="658368"/>
+            <a:ext cx="3840480" cy="5833872"/>
+          </a:xfrm>
+          <a:prstGeom prst="rect">
+            <a:avLst/>
+          </a:prstGeom>
+        </p:spPr>
+      </p:pic>
+      <p:sp>
+        <p:nvSpPr>
+          <p:cNvPr id="4" name="Text 1"/>
+          <p:cNvSpPr/>
+          <p:nvPr/>
+        </p:nvSpPr>
+        <p:spPr>
+          <a:xfrm>
+            <a:off x="4069080" y="1005840"/>
+            <a:ext cx="7802575" cy="731520"/>
+          </a:xfrm>
+          <a:prstGeom prst="rect">
+            <a:avLst/>
+          </a:prstGeom>
+          <a:noFill/>
+          <a:ln/>
+        </p:spPr>
+        <p:txBody>
+          <a:bodyPr wrap="square" lIns="0" tIns="0" rIns="0" bIns="0" rtlCol="0" anchor="ctr">
+            <a:normAutofit/>
+          </a:bodyPr>
+          <a:lstStyle/>
+          <a:p>
+            <a:pPr algn="ctr" indent="0" marL="0">
+              <a:buNone/>
+            </a:pPr>
+            <a:r>
+              <a:rPr lang="en-US" sz="3600" b="1" dirty="0">
+                <a:solidFill>
+                  <a:srgbClr val="990011"/>
+                </a:solidFill>
+                <a:latin typeface="Times New Roman" pitchFamily="34" charset="0"/>
+                <a:ea typeface="Times New Roman" pitchFamily="34" charset="-122"/>
+                <a:cs typeface="Times New Roman" pitchFamily="34" charset="-120"/>
+              </a:rPr>
+              <a:t>Remediation</a:t>
+            </a:r>
+            <a:endParaRPr lang="en-US" sz="3600" dirty="0"/>
+          </a:p>
+        </p:txBody>
+      </p:sp>
+      <p:sp>
+        <p:nvSpPr>
+          <p:cNvPr id="5" name="Text 2"/>
+          <p:cNvSpPr/>
+          <p:nvPr/>
+        </p:nvSpPr>
+        <p:spPr>
+          <a:xfrm>
+            <a:off x="4069080" y="1783080"/>
+            <a:ext cx="7802575" cy="4663440"/>
+          </a:xfrm>
+          <a:prstGeom prst="rect">
+            <a:avLst/>
+          </a:prstGeom>
+          <a:noFill/>
+          <a:ln/>
+        </p:spPr>
+        <p:txBody>
+          <a:bodyPr wrap="square" lIns="0" tIns="0" rIns="0" bIns="0" rtlCol="0" anchor="t"/>
+          <a:lstStyle/>
+          <a:p>
+            <a:pPr algn="l" indent="0" marL="0">
+              <a:spcAft>
+                <a:spcPts val="800"/>
+              </a:spcAft>
+              <a:buNone/>
+            </a:pPr>
+            <a:r>
+              <a:rPr lang="en-US" sz="4000" b="1" dirty="0">
+                <a:solidFill>
+                  <a:srgbClr val="111111"/>
+                </a:solidFill>
+                <a:latin typeface="Times New Roman" pitchFamily="34" charset="0"/>
+                <a:ea typeface="Times New Roman" pitchFamily="34" charset="-122"/>
+                <a:cs typeface="Times New Roman" pitchFamily="34" charset="-120"/>
+              </a:rPr>
+              <a:t>Fill in the blanks:</a:t>
+            </a:r>
+            <a:endParaRPr lang="en-US" sz="4000" dirty="0"/>
+          </a:p>
+          <a:p>
+            <a:pPr algn="l" marL="342900" indent="-342900">
+              <a:spcAft>
+                <a:spcPts val="800"/>
+              </a:spcAft>
+              <a:buSzPct val="100000"/>
+              <a:buFont typeface="+mj-lt"/>
+              <a:buAutoNum type="arabicPeriod" startAt="1"/>
+            </a:pPr>
+            <a:r>
+              <a:rPr lang="en-US" sz="4000" dirty="0">
+                <a:solidFill>
+                  <a:srgbClr val="111111"/>
+                </a:solidFill>
+                <a:latin typeface="Times New Roman" pitchFamily="34" charset="0"/>
+                <a:ea typeface="Times New Roman" pitchFamily="34" charset="-122"/>
+                <a:cs typeface="Times New Roman" pitchFamily="34" charset="-120"/>
+              </a:rPr>
+              <a:t>The most populated continent is ______.</a:t>
+            </a:r>
+            <a:endParaRPr lang="en-US" sz="4000" dirty="0"/>
+          </a:p>
+          <a:p>
+            <a:pPr algn="l" marL="342900" indent="-342900">
+              <a:spcAft>
+                <a:spcPts val="800"/>
+              </a:spcAft>
+              <a:buSzPct val="100000"/>
+              <a:buFont typeface="+mj-lt"/>
+              <a:buAutoNum type="arabicPeriod" startAt="1"/>
+            </a:pPr>
+            <a:r>
+              <a:rPr lang="en-US" sz="4000" dirty="0">
+                <a:solidFill>
+                  <a:srgbClr val="111111"/>
+                </a:solidFill>
+                <a:latin typeface="Times New Roman" pitchFamily="34" charset="0"/>
+                <a:ea typeface="Times New Roman" pitchFamily="34" charset="-122"/>
+                <a:cs typeface="Times New Roman" pitchFamily="34" charset="-120"/>
+              </a:rPr>
+              <a:t>The Sahara is a ______ area.</a:t>
+            </a:r>
+            <a:endParaRPr lang="en-US" sz="4000" dirty="0"/>
+          </a:p>
+          <a:p>
+            <a:pPr algn="l" marL="342900" indent="-342900">
+              <a:spcAft>
+                <a:spcPts val="800"/>
+              </a:spcAft>
+              <a:buSzPct val="100000"/>
+              <a:buFont typeface="+mj-lt"/>
+              <a:buAutoNum type="arabicPeriod" startAt="1"/>
+            </a:pPr>
+            <a:r>
+              <a:rPr lang="en-US" sz="4000" dirty="0">
+                <a:solidFill>
+                  <a:srgbClr val="111111"/>
+                </a:solidFill>
+                <a:latin typeface="Times New Roman" pitchFamily="34" charset="0"/>
+                <a:ea typeface="Times New Roman" pitchFamily="34" charset="-122"/>
+                <a:cs typeface="Times New Roman" pitchFamily="34" charset="-120"/>
+              </a:rPr>
+              <a:t>Most people live in the ______ Hemisphere.</a:t>
+            </a:r>
+            <a:endParaRPr lang="en-US" sz="4000" dirty="0"/>
+          </a:p>
+        </p:txBody>
+      </p:sp>
+      <p:sp>
+        <p:nvSpPr>
+          <p:cNvPr id="25" name="Slide Number Placeholder 0"/>
+          <p:cNvSpPr>
+            <a:spLocks noGrp="1"/>
+          </p:cNvSpPr>
+          <p:nvPr>
+            <p:ph type="sldNum" sz="quarter" idx="4294967295"/>
+          </p:nvPr>
+        </p:nvSpPr>
+        <p:spPr>
+          <a:xfrm>
+            <a:off x="27432" y="91440"/>
+            <a:ext cx="585216" cy="475488"/>
+          </a:xfrm>
+          <a:prstGeom prst="rect">
+            <a:avLst/>
+          </a:prstGeom>
+          <a:extLst>
+            <a:ext uri="{C572A759-6A51-4108-AA02-DFA0A04FC94B}">
+              <ma14:wrappingTextBoxFlag xmlns:ma14="http://schemas.microsoft.com/office/mac/drawingml/2011/main" val="0"/>
+            </a:ext>
+          </a:extLst>
+        </p:spPr>
+        <p:txBody>
+          <a:bodyPr/>
+          <a:lstStyle>
+            <a:lvl1pPr>
+              <a:defRPr sz="2000">
+                <a:solidFill>
+                  <a:srgbClr val="FFFFFF"/>
+                </a:solidFill>
+                <a:latin typeface="Calibri"/>
+                <a:ea typeface="Calibri"/>
+                <a:cs typeface="Calibri"/>
+              </a:defRPr>
+            </a:lvl1pPr>
+          </a:lstStyle>
+          <a:p>
+            <a:pPr algn="ctr"/>
+            <a:fld id="{F7021451-1387-4CA6-816F-3879F97B5CBC}" type="slidenum">
+              <a:rPr b="1" lang="en-US"/>
+              <a:t>46</a:t>
+            </a:fld>
+            <a:endParaRPr lang="en-US"/>
+          </a:p>
+        </p:txBody>
+      </p:sp>
+    </p:spTree>
+  </p:cSld>
+  <p:clrMapOvr>
+    <a:masterClrMapping/>
+  </p:clrMapOvr>
+</p:sld>
+</file>
+
+<file path=ppt/slides/slide47.xml><?xml version="1.0" encoding="utf-8"?>
+<p:sld xmlns:a="http://schemas.openxmlformats.org/drawingml/2006/main" xmlns:r="http://schemas.openxmlformats.org/officeDocument/2006/relationships" xmlns:p="http://schemas.openxmlformats.org/presentationml/2006/main">
+  <p:cSld name="Slide 47">
+    <p:spTree>
+      <p:nvGrpSpPr>
+        <p:cNvPr id="1" name=""/>
+        <p:cNvGrpSpPr/>
+        <p:nvPr/>
+      </p:nvGrpSpPr>
+      <p:grpSpPr>
+        <a:xfrm>
+          <a:off x="0" y="0"/>
+          <a:ext cx="0" cy="0"/>
+          <a:chOff x="0" y="0"/>
+          <a:chExt cx="0" cy="0"/>
+        </a:xfrm>
+      </p:grpSpPr>
+      <p:sp>
+        <p:nvSpPr>
+          <p:cNvPr id="2" name="Text 0"/>
+          <p:cNvSpPr/>
+          <p:nvPr/>
+        </p:nvSpPr>
+        <p:spPr>
+          <a:xfrm>
+            <a:off x="457200" y="713232"/>
+            <a:ext cx="11368735" cy="274320"/>
+          </a:xfrm>
+          <a:prstGeom prst="rect">
+            <a:avLst/>
+          </a:prstGeom>
+          <a:noFill/>
+          <a:ln/>
+        </p:spPr>
+        <p:txBody>
+          <a:bodyPr wrap="square" lIns="0" tIns="0" rIns="0" bIns="0" rtlCol="0" anchor="ctr"/>
+          <a:lstStyle/>
+          <a:p>
+            <a:pPr algn="r" indent="0" marL="0">
+              <a:buNone/>
+            </a:pPr>
+            <a:r>
+              <a:rPr lang="en-US" sz="1400" b="1" dirty="0">
+                <a:solidFill>
+                  <a:srgbClr val="1C3F6E"/>
+                </a:solidFill>
+                <a:latin typeface="Calibri" pitchFamily="34" charset="0"/>
+                <a:ea typeface="Calibri" pitchFamily="34" charset="-122"/>
+                <a:cs typeface="Calibri" pitchFamily="34" charset="-120"/>
+              </a:rPr>
+              <a:t>HOMEWORK</a:t>
+            </a:r>
+            <a:endParaRPr lang="en-US" sz="1400" dirty="0"/>
+          </a:p>
+        </p:txBody>
+      </p:sp>
+      <p:pic>
+        <p:nvPicPr>
+          <p:cNvPr id="3" name="Image 0" descr="/home/claude/f4/img/minesec_sheet.png">    </p:cNvPr>
+          <p:cNvPicPr>
+            <a:picLocks noChangeAspect="1"/>
+          </p:cNvPicPr>
+          <p:nvPr/>
+        </p:nvPicPr>
+        <p:blipFill>
+          <a:blip r:embed="rId1"/>
+          <a:stretch>
+            <a:fillRect/>
+          </a:stretch>
+        </p:blipFill>
+        <p:spPr>
+          <a:xfrm>
+            <a:off x="0" y="658368"/>
+            <a:ext cx="5120640" cy="5833872"/>
+          </a:xfrm>
+          <a:prstGeom prst="rect">
+            <a:avLst/>
+          </a:prstGeom>
+        </p:spPr>
+      </p:pic>
+      <p:sp>
+        <p:nvSpPr>
+          <p:cNvPr id="4" name="Text 1"/>
+          <p:cNvSpPr/>
+          <p:nvPr/>
+        </p:nvSpPr>
+        <p:spPr>
+          <a:xfrm>
+            <a:off x="5349240" y="1005840"/>
+            <a:ext cx="6522415" cy="731520"/>
+          </a:xfrm>
+          <a:prstGeom prst="rect">
+            <a:avLst/>
+          </a:prstGeom>
+          <a:noFill/>
+          <a:ln/>
+        </p:spPr>
+        <p:txBody>
+          <a:bodyPr wrap="square" lIns="0" tIns="0" rIns="0" bIns="0" rtlCol="0" anchor="ctr">
+            <a:normAutofit/>
+          </a:bodyPr>
+          <a:lstStyle/>
+          <a:p>
+            <a:pPr algn="ctr" indent="0" marL="0">
+              <a:buNone/>
+            </a:pPr>
+            <a:r>
+              <a:rPr lang="en-US" sz="3600" b="1" dirty="0">
+                <a:solidFill>
+                  <a:srgbClr val="990011"/>
+                </a:solidFill>
+                <a:latin typeface="Times New Roman" pitchFamily="34" charset="0"/>
+                <a:ea typeface="Times New Roman" pitchFamily="34" charset="-122"/>
+                <a:cs typeface="Times New Roman" pitchFamily="34" charset="-120"/>
+              </a:rPr>
+              <a:t>Homework</a:t>
+            </a:r>
+            <a:endParaRPr lang="en-US" sz="3600" dirty="0"/>
+          </a:p>
+        </p:txBody>
+      </p:sp>
+      <p:sp>
+        <p:nvSpPr>
+          <p:cNvPr id="5" name="Text 2"/>
+          <p:cNvSpPr/>
+          <p:nvPr/>
+        </p:nvSpPr>
+        <p:spPr>
+          <a:xfrm>
+            <a:off x="5349240" y="1783080"/>
+            <a:ext cx="6522415" cy="4663440"/>
+          </a:xfrm>
+          <a:prstGeom prst="rect">
+            <a:avLst/>
+          </a:prstGeom>
+          <a:noFill/>
+          <a:ln/>
+        </p:spPr>
+        <p:txBody>
+          <a:bodyPr wrap="square" lIns="0" tIns="0" rIns="0" bIns="0" rtlCol="0" anchor="t"/>
+          <a:lstStyle/>
+          <a:p>
+            <a:pPr algn="l" indent="0" marL="0">
+              <a:spcAft>
+                <a:spcPts val="800"/>
+              </a:spcAft>
+              <a:buNone/>
+            </a:pPr>
+            <a:r>
+              <a:rPr lang="en-US" sz="4000" dirty="0">
+                <a:solidFill>
+                  <a:srgbClr val="111111"/>
+                </a:solidFill>
+                <a:latin typeface="Times New Roman" pitchFamily="34" charset="0"/>
+                <a:ea typeface="Times New Roman" pitchFamily="34" charset="-122"/>
+                <a:cs typeface="Times New Roman" pitchFamily="34" charset="-120"/>
+              </a:rPr>
+              <a:t>Draw a sketch map of the world showing three dense and three sparse areas.</a:t>
+            </a:r>
+            <a:endParaRPr lang="en-US" sz="4000" dirty="0"/>
+          </a:p>
+        </p:txBody>
+      </p:sp>
+      <p:sp>
+        <p:nvSpPr>
+          <p:cNvPr id="25" name="Slide Number Placeholder 0"/>
+          <p:cNvSpPr>
+            <a:spLocks noGrp="1"/>
+          </p:cNvSpPr>
+          <p:nvPr>
+            <p:ph type="sldNum" sz="quarter" idx="4294967295"/>
+          </p:nvPr>
+        </p:nvSpPr>
+        <p:spPr>
+          <a:xfrm>
+            <a:off x="27432" y="91440"/>
+            <a:ext cx="585216" cy="475488"/>
+          </a:xfrm>
+          <a:prstGeom prst="rect">
+            <a:avLst/>
+          </a:prstGeom>
+          <a:extLst>
+            <a:ext uri="{C572A759-6A51-4108-AA02-DFA0A04FC94B}">
+              <ma14:wrappingTextBoxFlag xmlns:ma14="http://schemas.microsoft.com/office/mac/drawingml/2011/main" val="0"/>
+            </a:ext>
+          </a:extLst>
+        </p:spPr>
+        <p:txBody>
+          <a:bodyPr/>
+          <a:lstStyle>
+            <a:lvl1pPr>
+              <a:defRPr sz="2000">
+                <a:solidFill>
+                  <a:srgbClr val="FFFFFF"/>
+                </a:solidFill>
+                <a:latin typeface="Calibri"/>
+                <a:ea typeface="Calibri"/>
+                <a:cs typeface="Calibri"/>
+              </a:defRPr>
+            </a:lvl1pPr>
+          </a:lstStyle>
+          <a:p>
+            <a:pPr algn="ctr"/>
+            <a:fld id="{F7021451-1387-4CA6-816F-3879F97B5CBC}" type="slidenum">
+              <a:rPr b="1" lang="en-US"/>
+              <a:t>47</a:t>
+            </a:fld>
+            <a:endParaRPr lang="en-US"/>
+          </a:p>
+        </p:txBody>
+      </p:sp>
+    </p:spTree>
+  </p:cSld>
+  <p:clrMapOvr>
+    <a:masterClrMapping/>
+  </p:clrMapOvr>
+</p:sld>
+</file>
+
+<file path=ppt/slides/slide48.xml><?xml version="1.0" encoding="utf-8"?>
+<p:sld xmlns:a="http://schemas.openxmlformats.org/drawingml/2006/main" xmlns:r="http://schemas.openxmlformats.org/officeDocument/2006/relationships" xmlns:p="http://schemas.openxmlformats.org/presentationml/2006/main">
+  <p:cSld name="Slide 48">
+    <p:spTree>
+      <p:nvGrpSpPr>
+        <p:cNvPr id="1" name=""/>
+        <p:cNvGrpSpPr/>
+        <p:nvPr/>
+      </p:nvGrpSpPr>
+      <p:grpSpPr>
+        <a:xfrm>
+          <a:off x="0" y="0"/>
+          <a:ext cx="0" cy="0"/>
+          <a:chOff x="0" y="0"/>
+          <a:chExt cx="0" cy="0"/>
+        </a:xfrm>
+      </p:grpSpPr>
+      <p:sp>
+        <p:nvSpPr>
+          <p:cNvPr id="2" name="Text 0"/>
+          <p:cNvSpPr/>
+          <p:nvPr/>
+        </p:nvSpPr>
+        <p:spPr>
+          <a:xfrm>
+            <a:off x="457200" y="713232"/>
+            <a:ext cx="11368735" cy="274320"/>
+          </a:xfrm>
+          <a:prstGeom prst="rect">
+            <a:avLst/>
+          </a:prstGeom>
+          <a:noFill/>
+          <a:ln/>
+        </p:spPr>
+        <p:txBody>
+          <a:bodyPr wrap="square" lIns="0" tIns="0" rIns="0" bIns="0" rtlCol="0" anchor="ctr"/>
+          <a:lstStyle/>
+          <a:p>
+            <a:pPr algn="r" indent="0" marL="0">
+              <a:buNone/>
+            </a:pPr>
+            <a:r>
+              <a:rPr lang="en-US" sz="1400" b="1" dirty="0">
+                <a:solidFill>
+                  <a:srgbClr val="1C3F6E"/>
+                </a:solidFill>
+                <a:latin typeface="Calibri" pitchFamily="34" charset="0"/>
+                <a:ea typeface="Calibri" pitchFamily="34" charset="-122"/>
+                <a:cs typeface="Calibri" pitchFamily="34" charset="-120"/>
+              </a:rPr>
+              <a:t>NEXT LESSON</a:t>
+            </a:r>
+            <a:endParaRPr lang="en-US" sz="1400" dirty="0"/>
+          </a:p>
+        </p:txBody>
+      </p:sp>
+      <p:pic>
+        <p:nvPicPr>
+          <p:cNvPr id="3" name="Image 0" descr="/home/claude/f4/img/minesec_sheet.png">    </p:cNvPr>
+          <p:cNvPicPr>
+            <a:picLocks noChangeAspect="1"/>
+          </p:cNvPicPr>
+          <p:nvPr/>
+        </p:nvPicPr>
+        <p:blipFill>
+          <a:blip r:embed="rId1"/>
+          <a:stretch>
+            <a:fillRect/>
+          </a:stretch>
+        </p:blipFill>
+        <p:spPr>
+          <a:xfrm>
+            <a:off x="0" y="658368"/>
+            <a:ext cx="5120640" cy="5833872"/>
+          </a:xfrm>
+          <a:prstGeom prst="rect">
+            <a:avLst/>
+          </a:prstGeom>
+        </p:spPr>
+      </p:pic>
+      <p:sp>
+        <p:nvSpPr>
+          <p:cNvPr id="4" name="Text 1"/>
+          <p:cNvSpPr/>
+          <p:nvPr/>
+        </p:nvSpPr>
+        <p:spPr>
+          <a:xfrm>
+            <a:off x="5349240" y="1005840"/>
+            <a:ext cx="6522415" cy="731520"/>
+          </a:xfrm>
+          <a:prstGeom prst="rect">
+            <a:avLst/>
+          </a:prstGeom>
+          <a:noFill/>
+          <a:ln/>
+        </p:spPr>
+        <p:txBody>
+          <a:bodyPr wrap="square" lIns="0" tIns="0" rIns="0" bIns="0" rtlCol="0" anchor="ctr">
+            <a:normAutofit/>
+          </a:bodyPr>
+          <a:lstStyle/>
+          <a:p>
+            <a:pPr algn="ctr" indent="0" marL="0">
+              <a:buNone/>
+            </a:pPr>
+            <a:r>
+              <a:rPr lang="en-US" sz="3600" b="1" dirty="0">
+                <a:solidFill>
+                  <a:srgbClr val="990011"/>
+                </a:solidFill>
+                <a:latin typeface="Times New Roman" pitchFamily="34" charset="0"/>
+                <a:ea typeface="Times New Roman" pitchFamily="34" charset="-122"/>
+                <a:cs typeface="Times New Roman" pitchFamily="34" charset="-120"/>
+              </a:rPr>
+              <a:t>Next Lesson</a:t>
+            </a:r>
+            <a:endParaRPr lang="en-US" sz="3600" dirty="0"/>
+          </a:p>
+        </p:txBody>
+      </p:sp>
+      <p:sp>
+        <p:nvSpPr>
+          <p:cNvPr id="5" name="Text 2"/>
+          <p:cNvSpPr/>
+          <p:nvPr/>
+        </p:nvSpPr>
+        <p:spPr>
+          <a:xfrm>
+            <a:off x="5349240" y="1783080"/>
+            <a:ext cx="6522415" cy="4663440"/>
+          </a:xfrm>
+          <a:prstGeom prst="rect">
+            <a:avLst/>
+          </a:prstGeom>
+          <a:noFill/>
+          <a:ln/>
+        </p:spPr>
+        <p:txBody>
+          <a:bodyPr wrap="square" lIns="0" tIns="0" rIns="0" bIns="0" rtlCol="0" anchor="ctr"/>
+          <a:lstStyle/>
+          <a:p>
+            <a:pPr algn="ctr" indent="0" marL="0">
+              <a:spcAft>
+                <a:spcPts val="800"/>
+              </a:spcAft>
+              <a:buNone/>
+            </a:pPr>
+            <a:r>
+              <a:rPr lang="en-US" sz="4000" b="1" dirty="0">
+                <a:solidFill>
+                  <a:srgbClr val="111111"/>
+                </a:solidFill>
+                <a:latin typeface="Times New Roman" pitchFamily="34" charset="0"/>
+                <a:ea typeface="Times New Roman" pitchFamily="34" charset="-122"/>
+                <a:cs typeface="Times New Roman" pitchFamily="34" charset="-120"/>
+              </a:rPr>
+              <a:t>Our next lesson will be on:</a:t>
+            </a:r>
+            <a:endParaRPr lang="en-US" sz="4000" dirty="0"/>
+          </a:p>
+          <a:p>
+            <a:pPr algn="ctr" indent="0" marL="0">
+              <a:spcAft>
+                <a:spcPts val="800"/>
+              </a:spcAft>
+              <a:buNone/>
+            </a:pPr>
+            <a:r>
+              <a:rPr lang="en-US" sz="4000" b="1" dirty="0">
+                <a:solidFill>
+                  <a:srgbClr val="990011"/>
+                </a:solidFill>
+                <a:latin typeface="Times New Roman" pitchFamily="34" charset="0"/>
+                <a:ea typeface="Times New Roman" pitchFamily="34" charset="-122"/>
+                <a:cs typeface="Times New Roman" pitchFamily="34" charset="-120"/>
+              </a:rPr>
+              <a:t>Lesson 31: Age Composition of Population</a:t>
+            </a:r>
+            <a:endParaRPr lang="en-US" sz="4000" dirty="0"/>
+          </a:p>
+        </p:txBody>
+      </p:sp>
+      <p:sp>
+        <p:nvSpPr>
+          <p:cNvPr id="25" name="Slide Number Placeholder 0"/>
+          <p:cNvSpPr>
+            <a:spLocks noGrp="1"/>
+          </p:cNvSpPr>
+          <p:nvPr>
+            <p:ph type="sldNum" sz="quarter" idx="4294967295"/>
+          </p:nvPr>
+        </p:nvSpPr>
+        <p:spPr>
+          <a:xfrm>
+            <a:off x="27432" y="91440"/>
+            <a:ext cx="585216" cy="475488"/>
+          </a:xfrm>
+          <a:prstGeom prst="rect">
+            <a:avLst/>
+          </a:prstGeom>
+          <a:extLst>
+            <a:ext uri="{C572A759-6A51-4108-AA02-DFA0A04FC94B}">
+              <ma14:wrappingTextBoxFlag xmlns:ma14="http://schemas.microsoft.com/office/mac/drawingml/2011/main" val="0"/>
+            </a:ext>
+          </a:extLst>
+        </p:spPr>
+        <p:txBody>
+          <a:bodyPr/>
+          <a:lstStyle>
+            <a:lvl1pPr>
+              <a:defRPr sz="2000">
+                <a:solidFill>
+                  <a:srgbClr val="FFFFFF"/>
+                </a:solidFill>
+                <a:latin typeface="Calibri"/>
+                <a:ea typeface="Calibri"/>
+                <a:cs typeface="Calibri"/>
+              </a:defRPr>
+            </a:lvl1pPr>
+          </a:lstStyle>
+          <a:p>
+            <a:pPr algn="ctr"/>
+            <a:fld id="{F7021451-1387-4CA6-816F-3879F97B5CBC}" type="slidenum">
+              <a:rPr b="1" lang="en-US"/>
+              <a:t>48</a:t>
+            </a:fld>
+            <a:endParaRPr lang="en-US"/>
+          </a:p>
+        </p:txBody>
+      </p:sp>
+    </p:spTree>
+  </p:cSld>
+  <p:clrMapOvr>
+    <a:masterClrMapping/>
+  </p:clrMapOvr>
+</p:sld>
+</file>
+
+<file path=ppt/slides/slide49.xml><?xml version="1.0" encoding="utf-8"?>
+<p:sld xmlns:a="http://schemas.openxmlformats.org/drawingml/2006/main" xmlns:r="http://schemas.openxmlformats.org/officeDocument/2006/relationships" xmlns:p="http://schemas.openxmlformats.org/presentationml/2006/main">
+  <p:cSld name="Slide 49">
+    <p:spTree>
+      <p:nvGrpSpPr>
+        <p:cNvPr id="1" name=""/>
+        <p:cNvGrpSpPr/>
+        <p:nvPr/>
+      </p:nvGrpSpPr>
+      <p:grpSpPr>
+        <a:xfrm>
+          <a:off x="0" y="0"/>
+          <a:ext cx="0" cy="0"/>
+          <a:chOff x="0" y="0"/>
+          <a:chExt cx="0" cy="0"/>
+        </a:xfrm>
+      </p:grpSpPr>
+      <p:sp>
+        <p:nvSpPr>
+          <p:cNvPr id="2" name="Text 0"/>
+          <p:cNvSpPr/>
+          <p:nvPr/>
+        </p:nvSpPr>
+        <p:spPr>
+          <a:xfrm>
+            <a:off x="457200" y="713232"/>
+            <a:ext cx="11368735" cy="274320"/>
+          </a:xfrm>
+          <a:prstGeom prst="rect">
+            <a:avLst/>
+          </a:prstGeom>
+          <a:noFill/>
+          <a:ln/>
+        </p:spPr>
+        <p:txBody>
+          <a:bodyPr wrap="square" lIns="0" tIns="0" rIns="0" bIns="0" rtlCol="0" anchor="ctr"/>
+          <a:lstStyle/>
+          <a:p>
+            <a:pPr algn="r" indent="0" marL="0">
+              <a:buNone/>
+            </a:pPr>
+            <a:r>
+              <a:rPr lang="en-US" sz="1400" b="1" dirty="0">
+                <a:solidFill>
+                  <a:srgbClr val="1C3F6E"/>
+                </a:solidFill>
+                <a:latin typeface="Calibri" pitchFamily="34" charset="0"/>
+                <a:ea typeface="Calibri" pitchFamily="34" charset="-122"/>
+                <a:cs typeface="Calibri" pitchFamily="34" charset="-120"/>
+              </a:rPr>
               <a:t>BILINGUAL GAME</a:t>
             </a:r>
             <a:endParaRPr lang="en-US" sz="1400" dirty="0"/>
@@ -16292,7 +17482,7 @@
       </p:sp>
       <p:graphicFrame>
         <p:nvGraphicFramePr>
-          <p:cNvPr id="47" name="Table 0"/>
+          <p:cNvPr id="50" name="Table 0"/>
           <p:cNvGraphicFramePr>
             <a:graphicFrameLocks noGrp="1"/>
           </p:cNvGraphicFramePr>
@@ -17328,7 +18518,7 @@
             <a:pPr algn="ctr"/>
             <a:fld id="{F7021451-1387-4CA6-816F-3879F97B5CBC}" type="slidenum">
               <a:rPr b="1" lang="en-US"/>
-              <a:t>46</a:t>
+              <a:t>49</a:t>
             </a:fld>
             <a:endParaRPr lang="en-US"/>
           </a:p>
@@ -17342,9 +18532,9 @@
 </p:sld>
 </file>
 
-<file path=ppt/slides/slide47.xml><?xml version="1.0" encoding="utf-8"?>
+<file path=ppt/slides/slide5.xml><?xml version="1.0" encoding="utf-8"?>
 <p:sld xmlns:a="http://schemas.openxmlformats.org/drawingml/2006/main" xmlns:r="http://schemas.openxmlformats.org/officeDocument/2006/relationships" xmlns:p="http://schemas.openxmlformats.org/presentationml/2006/main">
-  <p:cSld name="Slide 47">
+  <p:cSld name="Slide 5">
     <p:spTree>
       <p:nvGrpSpPr>
         <p:cNvPr id="1" name=""/>
@@ -17392,6 +18582,225 @@
                 <a:ea typeface="Calibri" pitchFamily="34" charset="-122"/>
                 <a:cs typeface="Calibri" pitchFamily="34" charset="-120"/>
               </a:rPr>
+              <a:t>HOMEWORK CORRECTION</a:t>
+            </a:r>
+            <a:endParaRPr lang="en-US" sz="1400" dirty="0"/>
+          </a:p>
+        </p:txBody>
+      </p:sp>
+      <p:pic>
+        <p:nvPicPr>
+          <p:cNvPr id="3" name="Image 0" descr="/home/claude/f4/img/minesec_sheet.png">    </p:cNvPr>
+          <p:cNvPicPr>
+            <a:picLocks noChangeAspect="1"/>
+          </p:cNvPicPr>
+          <p:nvPr/>
+        </p:nvPicPr>
+        <p:blipFill>
+          <a:blip r:embed="rId1"/>
+          <a:stretch>
+            <a:fillRect/>
+          </a:stretch>
+        </p:blipFill>
+        <p:spPr>
+          <a:xfrm>
+            <a:off x="0" y="658368"/>
+            <a:ext cx="5120640" cy="5833872"/>
+          </a:xfrm>
+          <a:prstGeom prst="rect">
+            <a:avLst/>
+          </a:prstGeom>
+        </p:spPr>
+      </p:pic>
+      <p:sp>
+        <p:nvSpPr>
+          <p:cNvPr id="4" name="Text 1"/>
+          <p:cNvSpPr/>
+          <p:nvPr/>
+        </p:nvSpPr>
+        <p:spPr>
+          <a:xfrm>
+            <a:off x="5349240" y="1005840"/>
+            <a:ext cx="6522415" cy="731520"/>
+          </a:xfrm>
+          <a:prstGeom prst="rect">
+            <a:avLst/>
+          </a:prstGeom>
+          <a:noFill/>
+          <a:ln/>
+        </p:spPr>
+        <p:txBody>
+          <a:bodyPr wrap="square" lIns="0" tIns="0" rIns="0" bIns="0" rtlCol="0" anchor="ctr">
+            <a:normAutofit/>
+          </a:bodyPr>
+          <a:lstStyle/>
+          <a:p>
+            <a:pPr algn="ctr" indent="0" marL="0">
+              <a:buNone/>
+            </a:pPr>
+            <a:r>
+              <a:rPr lang="en-US" sz="3600" b="1" dirty="0">
+                <a:solidFill>
+                  <a:srgbClr val="990011"/>
+                </a:solidFill>
+                <a:latin typeface="Times New Roman" pitchFamily="34" charset="0"/>
+                <a:ea typeface="Times New Roman" pitchFamily="34" charset="-122"/>
+                <a:cs typeface="Times New Roman" pitchFamily="34" charset="-120"/>
+              </a:rPr>
+              <a:t>Correction: Possible Answer</a:t>
+            </a:r>
+            <a:endParaRPr lang="en-US" sz="3600" dirty="0"/>
+          </a:p>
+        </p:txBody>
+      </p:sp>
+      <p:sp>
+        <p:nvSpPr>
+          <p:cNvPr id="5" name="Text 2"/>
+          <p:cNvSpPr/>
+          <p:nvPr/>
+        </p:nvSpPr>
+        <p:spPr>
+          <a:xfrm>
+            <a:off x="5349240" y="1783080"/>
+            <a:ext cx="6522415" cy="4663440"/>
+          </a:xfrm>
+          <a:prstGeom prst="rect">
+            <a:avLst/>
+          </a:prstGeom>
+          <a:noFill/>
+          <a:ln/>
+        </p:spPr>
+        <p:txBody>
+          <a:bodyPr wrap="square" lIns="0" tIns="0" rIns="0" bIns="0" rtlCol="0" anchor="t"/>
+          <a:lstStyle/>
+          <a:p>
+            <a:pPr algn="l" indent="0" marL="0">
+              <a:spcAft>
+                <a:spcPts val="800"/>
+              </a:spcAft>
+              <a:buNone/>
+            </a:pPr>
+            <a:r>
+              <a:rPr lang="en-US" sz="4000" dirty="0">
+                <a:solidFill>
+                  <a:srgbClr val="111111"/>
+                </a:solidFill>
+                <a:latin typeface="Times New Roman" pitchFamily="34" charset="0"/>
+                <a:ea typeface="Times New Roman" pitchFamily="34" charset="-122"/>
+                <a:cs typeface="Times New Roman" pitchFamily="34" charset="-120"/>
+              </a:rPr>
+              <a:t>Classes: under 20, 20–50, 50–100, over 100 per km²; darkest for the Littoral, West, Far North and North-West; lightest for the East and South.</a:t>
+            </a:r>
+            <a:endParaRPr lang="en-US" sz="4000" dirty="0"/>
+          </a:p>
+        </p:txBody>
+      </p:sp>
+      <p:sp>
+        <p:nvSpPr>
+          <p:cNvPr id="25" name="Slide Number Placeholder 0"/>
+          <p:cNvSpPr>
+            <a:spLocks noGrp="1"/>
+          </p:cNvSpPr>
+          <p:nvPr>
+            <p:ph type="sldNum" sz="quarter" idx="4294967295"/>
+          </p:nvPr>
+        </p:nvSpPr>
+        <p:spPr>
+          <a:xfrm>
+            <a:off x="27432" y="91440"/>
+            <a:ext cx="585216" cy="475488"/>
+          </a:xfrm>
+          <a:prstGeom prst="rect">
+            <a:avLst/>
+          </a:prstGeom>
+          <a:extLst>
+            <a:ext uri="{C572A759-6A51-4108-AA02-DFA0A04FC94B}">
+              <ma14:wrappingTextBoxFlag xmlns:ma14="http://schemas.microsoft.com/office/mac/drawingml/2011/main" val="0"/>
+            </a:ext>
+          </a:extLst>
+        </p:spPr>
+        <p:txBody>
+          <a:bodyPr/>
+          <a:lstStyle>
+            <a:lvl1pPr>
+              <a:defRPr sz="2000">
+                <a:solidFill>
+                  <a:srgbClr val="FFFFFF"/>
+                </a:solidFill>
+                <a:latin typeface="Calibri"/>
+                <a:ea typeface="Calibri"/>
+                <a:cs typeface="Calibri"/>
+              </a:defRPr>
+            </a:lvl1pPr>
+          </a:lstStyle>
+          <a:p>
+            <a:pPr algn="ctr"/>
+            <a:fld id="{F7021451-1387-4CA6-816F-3879F97B5CBC}" type="slidenum">
+              <a:rPr b="1" lang="en-US"/>
+              <a:t>5</a:t>
+            </a:fld>
+            <a:endParaRPr lang="en-US"/>
+          </a:p>
+        </p:txBody>
+      </p:sp>
+    </p:spTree>
+  </p:cSld>
+  <p:clrMapOvr>
+    <a:masterClrMapping/>
+  </p:clrMapOvr>
+</p:sld>
+</file>
+
+<file path=ppt/slides/slide50.xml><?xml version="1.0" encoding="utf-8"?>
+<p:sld xmlns:a="http://schemas.openxmlformats.org/drawingml/2006/main" xmlns:r="http://schemas.openxmlformats.org/officeDocument/2006/relationships" xmlns:p="http://schemas.openxmlformats.org/presentationml/2006/main">
+  <p:cSld name="Slide 50">
+    <p:spTree>
+      <p:nvGrpSpPr>
+        <p:cNvPr id="1" name=""/>
+        <p:cNvGrpSpPr/>
+        <p:nvPr/>
+      </p:nvGrpSpPr>
+      <p:grpSpPr>
+        <a:xfrm>
+          <a:off x="0" y="0"/>
+          <a:ext cx="0" cy="0"/>
+          <a:chOff x="0" y="0"/>
+          <a:chExt cx="0" cy="0"/>
+        </a:xfrm>
+      </p:grpSpPr>
+      <p:sp>
+        <p:nvSpPr>
+          <p:cNvPr id="2" name="Text 0"/>
+          <p:cNvSpPr/>
+          <p:nvPr/>
+        </p:nvSpPr>
+        <p:spPr>
+          <a:xfrm>
+            <a:off x="457200" y="713232"/>
+            <a:ext cx="11368735" cy="274320"/>
+          </a:xfrm>
+          <a:prstGeom prst="rect">
+            <a:avLst/>
+          </a:prstGeom>
+          <a:noFill/>
+          <a:ln/>
+        </p:spPr>
+        <p:txBody>
+          <a:bodyPr wrap="square" lIns="0" tIns="0" rIns="0" bIns="0" rtlCol="0" anchor="ctr"/>
+          <a:lstStyle/>
+          <a:p>
+            <a:pPr algn="r" indent="0" marL="0">
+              <a:buNone/>
+            </a:pPr>
+            <a:r>
+              <a:rPr lang="en-US" sz="1400" b="1" dirty="0">
+                <a:solidFill>
+                  <a:srgbClr val="1C3F6E"/>
+                </a:solidFill>
+                <a:latin typeface="Calibri" pitchFamily="34" charset="0"/>
+                <a:ea typeface="Calibri" pitchFamily="34" charset="-122"/>
+                <a:cs typeface="Calibri" pitchFamily="34" charset="-120"/>
+              </a:rPr>
               <a:t>LOGBOOK</a:t>
             </a:r>
             <a:endParaRPr lang="en-US" sz="1400" dirty="0"/>
@@ -17439,7 +18848,7 @@
       </p:sp>
       <p:graphicFrame>
         <p:nvGraphicFramePr>
-          <p:cNvPr id="48" name="Table 0"/>
+          <p:cNvPr id="51" name="Table 0"/>
           <p:cNvGraphicFramePr>
             <a:graphicFrameLocks noGrp="1"/>
           </p:cNvGraphicFramePr>
@@ -18061,7 +19470,7 @@
             <a:pPr algn="ctr"/>
             <a:fld id="{F7021451-1387-4CA6-816F-3879F97B5CBC}" type="slidenum">
               <a:rPr b="1" lang="en-US"/>
-              <a:t>47</a:t>
+              <a:t>50</a:t>
             </a:fld>
             <a:endParaRPr lang="en-US"/>
           </a:p>
@@ -18075,9 +19484,9 @@
 </p:sld>
 </file>
 
-<file path=ppt/slides/slide48.xml><?xml version="1.0" encoding="utf-8"?>
+<file path=ppt/slides/slide51.xml><?xml version="1.0" encoding="utf-8"?>
 <p:sld xmlns:a="http://schemas.openxmlformats.org/drawingml/2006/main" xmlns:r="http://schemas.openxmlformats.org/officeDocument/2006/relationships" xmlns:p="http://schemas.openxmlformats.org/presentationml/2006/main">
-  <p:cSld name="Slide 48">
+  <p:cSld name="Slide 51">
     <p:spTree>
       <p:nvGrpSpPr>
         <p:cNvPr id="1" name=""/>
@@ -18172,7 +19581,7 @@
       </p:sp>
       <p:graphicFrame>
         <p:nvGraphicFramePr>
-          <p:cNvPr id="49" name="Table 0"/>
+          <p:cNvPr id="52" name="Table 0"/>
           <p:cNvGraphicFramePr>
             <a:graphicFrameLocks noGrp="1"/>
           </p:cNvGraphicFramePr>
@@ -18282,7 +19691,7 @@
                           <a:ea typeface="Calibri" pitchFamily="34" charset="-122"/>
                           <a:cs typeface="Calibri" pitchFamily="34" charset="-120"/>
                         </a:rPr>
-                        <a:t>Uneven Distribution; Major Areas of Dense, Moderate and Sparse Population.</a:t>
+                        <a:t>Uneven Distribution; The Areas; Reasons.</a:t>
                       </a:r>
                       <a:endParaRPr lang="en-US" sz="1600" dirty="0">
                         <a:latin typeface="Calibri" charset="0"/>
@@ -18932,7 +20341,7 @@
             <a:pPr algn="ctr"/>
             <a:fld id="{F7021451-1387-4CA6-816F-3879F97B5CBC}" type="slidenum">
               <a:rPr b="1" lang="en-US"/>
-              <a:t>48</a:t>
+              <a:t>51</a:t>
             </a:fld>
             <a:endParaRPr lang="en-US"/>
           </a:p>
@@ -18946,9 +20355,9 @@
 </p:sld>
 </file>
 
-<file path=ppt/slides/slide49.xml><?xml version="1.0" encoding="utf-8"?>
+<file path=ppt/slides/slide52.xml><?xml version="1.0" encoding="utf-8"?>
 <p:sld xmlns:a="http://schemas.openxmlformats.org/drawingml/2006/main" xmlns:r="http://schemas.openxmlformats.org/officeDocument/2006/relationships" xmlns:p="http://schemas.openxmlformats.org/presentationml/2006/main">
-  <p:cSld name="Slide 49">
+  <p:cSld name="Slide 52">
     <p:spTree>
       <p:nvGrpSpPr>
         <p:cNvPr id="1" name=""/>
@@ -19257,7 +20666,7 @@
             <a:pPr algn="ctr"/>
             <a:fld id="{F7021451-1387-4CA6-816F-3879F97B5CBC}" type="slidenum">
               <a:rPr b="1" lang="en-US"/>
-              <a:t>49</a:t>
+              <a:t>52</a:t>
             </a:fld>
             <a:endParaRPr lang="en-US"/>
           </a:p>
@@ -19271,9 +20680,9 @@
 </p:sld>
 </file>
 
-<file path=ppt/slides/slide5.xml><?xml version="1.0" encoding="utf-8"?>
+<file path=ppt/slides/slide53.xml><?xml version="1.0" encoding="utf-8"?>
 <p:sld xmlns:a="http://schemas.openxmlformats.org/drawingml/2006/main" xmlns:r="http://schemas.openxmlformats.org/officeDocument/2006/relationships" xmlns:p="http://schemas.openxmlformats.org/presentationml/2006/main">
-  <p:cSld name="Slide 5">
+  <p:cSld name="Slide 53">
     <p:spTree>
       <p:nvGrpSpPr>
         <p:cNvPr id="1" name=""/>
@@ -19321,7 +20730,7 @@
                 <a:ea typeface="Calibri" pitchFamily="34" charset="-122"/>
                 <a:cs typeface="Calibri" pitchFamily="34" charset="-120"/>
               </a:rPr>
-              <a:t>HOMEWORK CORRECTION</a:t>
+              <a:t>REFERENCES</a:t>
             </a:r>
             <a:endParaRPr lang="en-US" sz="1400" dirty="0"/>
           </a:p>
@@ -19386,7 +20795,7 @@
                 <a:ea typeface="Times New Roman" pitchFamily="34" charset="-122"/>
                 <a:cs typeface="Times New Roman" pitchFamily="34" charset="-120"/>
               </a:rPr>
-              <a:t>Correction: Possible Answer</a:t>
+              <a:t>References</a:t>
             </a:r>
             <a:endParaRPr lang="en-US" sz="3600" dirty="0"/>
           </a:p>
@@ -19413,24 +20822,88 @@
           <a:bodyPr wrap="square" lIns="0" tIns="0" rIns="0" bIns="0" rtlCol="0" anchor="t"/>
           <a:lstStyle/>
           <a:p>
-            <a:pPr algn="l" indent="0" marL="0">
+            <a:pPr algn="l" marL="342900" indent="-342900">
               <a:spcAft>
                 <a:spcPts val="800"/>
               </a:spcAft>
-              <a:buNone/>
+              <a:buSzPct val="100000"/>
+              <a:buChar char="•"/>
             </a:pPr>
             <a:r>
-              <a:rPr lang="en-US" sz="4000" dirty="0">
+              <a:rPr lang="en-US" sz="1800" dirty="0">
                 <a:solidFill>
                   <a:srgbClr val="111111"/>
                 </a:solidFill>
-                <a:latin typeface="Times New Roman" pitchFamily="34" charset="0"/>
-                <a:ea typeface="Times New Roman" pitchFamily="34" charset="-122"/>
-                <a:cs typeface="Times New Roman" pitchFamily="34" charset="-120"/>
+                <a:latin typeface="Calibri" pitchFamily="34" charset="0"/>
+                <a:ea typeface="Calibri" pitchFamily="34" charset="-122"/>
+                <a:cs typeface="Calibri" pitchFamily="34" charset="-120"/>
               </a:rPr>
-              <a:t>Classes: under 20, 20–50, 50–100, over 100 per km²; darkest for the Littoral, West, Far North and North-West; lightest for the East and South.</a:t>
-            </a:r>
-            <a:endParaRPr lang="en-US" sz="4000" dirty="0"/>
+              <a:t>Geography Syllabus, Forms I–V, MINESEC (2023) — Form 5, Module III: Management of Population Growth and Space Colonisation.</a:t>
+            </a:r>
+            <a:endParaRPr lang="en-US" sz="1800" dirty="0"/>
+          </a:p>
+          <a:p>
+            <a:pPr algn="l" marL="342900" indent="-342900">
+              <a:spcAft>
+                <a:spcPts val="800"/>
+              </a:spcAft>
+              <a:buSzPct val="100000"/>
+              <a:buChar char="•"/>
+            </a:pPr>
+            <a:r>
+              <a:rPr lang="en-US" sz="1800" dirty="0">
+                <a:solidFill>
+                  <a:srgbClr val="111111"/>
+                </a:solidFill>
+                <a:latin typeface="Calibri" pitchFamily="34" charset="0"/>
+                <a:ea typeface="Calibri" pitchFamily="34" charset="-122"/>
+                <a:cs typeface="Calibri" pitchFamily="34" charset="-120"/>
+              </a:rPr>
+              <a:t>Photo, Activity 2: “Tokyo from the Air” by Trey Ratcliff, CC BY-NC-SA 2.0, via Flickr (https://www.flickr.com/photos/95572727@N00/4140101118)</a:t>
+            </a:r>
+            <a:endParaRPr lang="en-US" sz="1800" dirty="0"/>
+          </a:p>
+          <a:p>
+            <a:pPr algn="l" marL="342900" indent="-342900">
+              <a:spcAft>
+                <a:spcPts val="800"/>
+              </a:spcAft>
+              <a:buSzPct val="100000"/>
+              <a:buChar char="•"/>
+            </a:pPr>
+            <a:r>
+              <a:rPr lang="en-US" sz="1800" dirty="0">
+                <a:solidFill>
+                  <a:srgbClr val="111111"/>
+                </a:solidFill>
+                <a:latin typeface="Calibri" pitchFamily="34" charset="0"/>
+                <a:ea typeface="Calibri" pitchFamily="34" charset="-122"/>
+                <a:cs typeface="Calibri" pitchFamily="34" charset="-120"/>
+              </a:rPr>
+              <a:t>Photo, Activity 4: “Desert trekking in Merzouga” by Antonio Cinotti , CC BY-NC-ND 2.0, via Flickr (https://www.flickr.com/photos/46378751@N02/15331399979)</a:t>
+            </a:r>
+            <a:endParaRPr lang="en-US" sz="1800" dirty="0"/>
+          </a:p>
+          <a:p>
+            <a:pPr algn="l" marL="342900" indent="-342900">
+              <a:spcAft>
+                <a:spcPts val="800"/>
+              </a:spcAft>
+              <a:buSzPct val="100000"/>
+              <a:buChar char="•"/>
+            </a:pPr>
+            <a:r>
+              <a:rPr lang="en-US" sz="1800" dirty="0">
+                <a:solidFill>
+                  <a:srgbClr val="111111"/>
+                </a:solidFill>
+                <a:latin typeface="Calibri" pitchFamily="34" charset="0"/>
+                <a:ea typeface="Calibri" pitchFamily="34" charset="-122"/>
+                <a:cs typeface="Calibri" pitchFamily="34" charset="-120"/>
+              </a:rPr>
+              <a:t>Diagrams and animations: drawn for this lesson (Geography Department).</a:t>
+            </a:r>
+            <a:endParaRPr lang="en-US" sz="1800" dirty="0"/>
           </a:p>
         </p:txBody>
       </p:sp>
@@ -19476,290 +20949,7 @@
             <a:pPr algn="ctr"/>
             <a:fld id="{F7021451-1387-4CA6-816F-3879F97B5CBC}" type="slidenum">
               <a:rPr b="1" lang="en-US"/>
-              <a:t>5</a:t>
-            </a:fld>
-            <a:endParaRPr lang="en-US"/>
-          </a:p>
-        </p:txBody>
-      </p:sp>
-    </p:spTree>
-  </p:cSld>
-  <p:clrMapOvr>
-    <a:masterClrMapping/>
-  </p:clrMapOvr>
-</p:sld>
-</file>
-
-<file path=ppt/slides/slide50.xml><?xml version="1.0" encoding="utf-8"?>
-<p:sld xmlns:a="http://schemas.openxmlformats.org/drawingml/2006/main" xmlns:r="http://schemas.openxmlformats.org/officeDocument/2006/relationships" xmlns:p="http://schemas.openxmlformats.org/presentationml/2006/main">
-  <p:cSld name="Slide 50">
-    <p:spTree>
-      <p:nvGrpSpPr>
-        <p:cNvPr id="1" name=""/>
-        <p:cNvGrpSpPr/>
-        <p:nvPr/>
-      </p:nvGrpSpPr>
-      <p:grpSpPr>
-        <a:xfrm>
-          <a:off x="0" y="0"/>
-          <a:ext cx="0" cy="0"/>
-          <a:chOff x="0" y="0"/>
-          <a:chExt cx="0" cy="0"/>
-        </a:xfrm>
-      </p:grpSpPr>
-      <p:sp>
-        <p:nvSpPr>
-          <p:cNvPr id="2" name="Text 0"/>
-          <p:cNvSpPr/>
-          <p:nvPr/>
-        </p:nvSpPr>
-        <p:spPr>
-          <a:xfrm>
-            <a:off x="457200" y="713232"/>
-            <a:ext cx="11368735" cy="274320"/>
-          </a:xfrm>
-          <a:prstGeom prst="rect">
-            <a:avLst/>
-          </a:prstGeom>
-          <a:noFill/>
-          <a:ln/>
-        </p:spPr>
-        <p:txBody>
-          <a:bodyPr wrap="square" lIns="0" tIns="0" rIns="0" bIns="0" rtlCol="0" anchor="ctr"/>
-          <a:lstStyle/>
-          <a:p>
-            <a:pPr algn="r" indent="0" marL="0">
-              <a:buNone/>
-            </a:pPr>
-            <a:r>
-              <a:rPr lang="en-US" sz="1400" b="1" dirty="0">
-                <a:solidFill>
-                  <a:srgbClr val="1C3F6E"/>
-                </a:solidFill>
-                <a:latin typeface="Calibri" pitchFamily="34" charset="0"/>
-                <a:ea typeface="Calibri" pitchFamily="34" charset="-122"/>
-                <a:cs typeface="Calibri" pitchFamily="34" charset="-120"/>
-              </a:rPr>
-              <a:t>REFERENCES</a:t>
-            </a:r>
-            <a:endParaRPr lang="en-US" sz="1400" dirty="0"/>
-          </a:p>
-        </p:txBody>
-      </p:sp>
-      <p:pic>
-        <p:nvPicPr>
-          <p:cNvPr id="3" name="Image 0" descr="/home/claude/f4/img/minesec_sheet.png">    </p:cNvPr>
-          <p:cNvPicPr>
-            <a:picLocks noChangeAspect="1"/>
-          </p:cNvPicPr>
-          <p:nvPr/>
-        </p:nvPicPr>
-        <p:blipFill>
-          <a:blip r:embed="rId1"/>
-          <a:stretch>
-            <a:fillRect/>
-          </a:stretch>
-        </p:blipFill>
-        <p:spPr>
-          <a:xfrm>
-            <a:off x="0" y="658368"/>
-            <a:ext cx="5120640" cy="5833872"/>
-          </a:xfrm>
-          <a:prstGeom prst="rect">
-            <a:avLst/>
-          </a:prstGeom>
-        </p:spPr>
-      </p:pic>
-      <p:sp>
-        <p:nvSpPr>
-          <p:cNvPr id="4" name="Text 1"/>
-          <p:cNvSpPr/>
-          <p:nvPr/>
-        </p:nvSpPr>
-        <p:spPr>
-          <a:xfrm>
-            <a:off x="5349240" y="1005840"/>
-            <a:ext cx="6522415" cy="731520"/>
-          </a:xfrm>
-          <a:prstGeom prst="rect">
-            <a:avLst/>
-          </a:prstGeom>
-          <a:noFill/>
-          <a:ln/>
-        </p:spPr>
-        <p:txBody>
-          <a:bodyPr wrap="square" lIns="0" tIns="0" rIns="0" bIns="0" rtlCol="0" anchor="ctr">
-            <a:normAutofit/>
-          </a:bodyPr>
-          <a:lstStyle/>
-          <a:p>
-            <a:pPr algn="ctr" indent="0" marL="0">
-              <a:buNone/>
-            </a:pPr>
-            <a:r>
-              <a:rPr lang="en-US" sz="3600" b="1" dirty="0">
-                <a:solidFill>
-                  <a:srgbClr val="990011"/>
-                </a:solidFill>
-                <a:latin typeface="Times New Roman" pitchFamily="34" charset="0"/>
-                <a:ea typeface="Times New Roman" pitchFamily="34" charset="-122"/>
-                <a:cs typeface="Times New Roman" pitchFamily="34" charset="-120"/>
-              </a:rPr>
-              <a:t>References</a:t>
-            </a:r>
-            <a:endParaRPr lang="en-US" sz="3600" dirty="0"/>
-          </a:p>
-        </p:txBody>
-      </p:sp>
-      <p:sp>
-        <p:nvSpPr>
-          <p:cNvPr id="5" name="Text 2"/>
-          <p:cNvSpPr/>
-          <p:nvPr/>
-        </p:nvSpPr>
-        <p:spPr>
-          <a:xfrm>
-            <a:off x="5349240" y="1783080"/>
-            <a:ext cx="6522415" cy="4663440"/>
-          </a:xfrm>
-          <a:prstGeom prst="rect">
-            <a:avLst/>
-          </a:prstGeom>
-          <a:noFill/>
-          <a:ln/>
-        </p:spPr>
-        <p:txBody>
-          <a:bodyPr wrap="square" lIns="0" tIns="0" rIns="0" bIns="0" rtlCol="0" anchor="t"/>
-          <a:lstStyle/>
-          <a:p>
-            <a:pPr algn="l" marL="342900" indent="-342900">
-              <a:spcAft>
-                <a:spcPts val="800"/>
-              </a:spcAft>
-              <a:buSzPct val="100000"/>
-              <a:buChar char="•"/>
-            </a:pPr>
-            <a:r>
-              <a:rPr lang="en-US" sz="1800" dirty="0">
-                <a:solidFill>
-                  <a:srgbClr val="111111"/>
-                </a:solidFill>
-                <a:latin typeface="Calibri" pitchFamily="34" charset="0"/>
-                <a:ea typeface="Calibri" pitchFamily="34" charset="-122"/>
-                <a:cs typeface="Calibri" pitchFamily="34" charset="-120"/>
-              </a:rPr>
-              <a:t>Geography Syllabus, Forms I–V, MINESEC (2023) — Form 5, Module III: Management of Population Growth and Space Colonisation.</a:t>
-            </a:r>
-            <a:endParaRPr lang="en-US" sz="1800" dirty="0"/>
-          </a:p>
-          <a:p>
-            <a:pPr algn="l" marL="342900" indent="-342900">
-              <a:spcAft>
-                <a:spcPts val="800"/>
-              </a:spcAft>
-              <a:buSzPct val="100000"/>
-              <a:buChar char="•"/>
-            </a:pPr>
-            <a:r>
-              <a:rPr lang="en-US" sz="1800" dirty="0">
-                <a:solidFill>
-                  <a:srgbClr val="111111"/>
-                </a:solidFill>
-                <a:latin typeface="Calibri" pitchFamily="34" charset="0"/>
-                <a:ea typeface="Calibri" pitchFamily="34" charset="-122"/>
-                <a:cs typeface="Calibri" pitchFamily="34" charset="-120"/>
-              </a:rPr>
-              <a:t>Photo, Activity 2: “Tokyo from the Air” by Trey Ratcliff, CC BY-NC-SA 2.0, via Flickr (https://www.flickr.com/photos/95572727@N00/4140101118)</a:t>
-            </a:r>
-            <a:endParaRPr lang="en-US" sz="1800" dirty="0"/>
-          </a:p>
-          <a:p>
-            <a:pPr algn="l" marL="342900" indent="-342900">
-              <a:spcAft>
-                <a:spcPts val="800"/>
-              </a:spcAft>
-              <a:buSzPct val="100000"/>
-              <a:buChar char="•"/>
-            </a:pPr>
-            <a:r>
-              <a:rPr lang="en-US" sz="1800" dirty="0">
-                <a:solidFill>
-                  <a:srgbClr val="111111"/>
-                </a:solidFill>
-                <a:latin typeface="Calibri" pitchFamily="34" charset="0"/>
-                <a:ea typeface="Calibri" pitchFamily="34" charset="-122"/>
-                <a:cs typeface="Calibri" pitchFamily="34" charset="-120"/>
-              </a:rPr>
-              <a:t>Photo, Activity 4: “Desert trekking in Merzouga” by Antonio Cinotti , CC BY-NC-ND 2.0, via Flickr (https://www.flickr.com/photos/46378751@N02/15331399979)</a:t>
-            </a:r>
-            <a:endParaRPr lang="en-US" sz="1800" dirty="0"/>
-          </a:p>
-          <a:p>
-            <a:pPr algn="l" marL="342900" indent="-342900">
-              <a:spcAft>
-                <a:spcPts val="800"/>
-              </a:spcAft>
-              <a:buSzPct val="100000"/>
-              <a:buChar char="•"/>
-            </a:pPr>
-            <a:r>
-              <a:rPr lang="en-US" sz="1800" dirty="0">
-                <a:solidFill>
-                  <a:srgbClr val="111111"/>
-                </a:solidFill>
-                <a:latin typeface="Calibri" pitchFamily="34" charset="0"/>
-                <a:ea typeface="Calibri" pitchFamily="34" charset="-122"/>
-                <a:cs typeface="Calibri" pitchFamily="34" charset="-120"/>
-              </a:rPr>
-              <a:t>Diagrams and animations: drawn for this lesson (Geography Department).</a:t>
-            </a:r>
-            <a:endParaRPr lang="en-US" sz="1800" dirty="0"/>
-          </a:p>
-        </p:txBody>
-      </p:sp>
-      <p:sp>
-        <p:nvSpPr>
-          <p:cNvPr id="25" name="Slide Number Placeholder 0"/>
-          <p:cNvSpPr>
-            <a:spLocks noGrp="1"/>
-          </p:cNvSpPr>
-          <p:nvPr>
-            <p:ph type="sldNum" sz="quarter" idx="4294967295"/>
-          </p:nvPr>
-        </p:nvSpPr>
-        <p:spPr>
-          <a:xfrm>
-            <a:off x="27432" y="91440"/>
-            <a:ext cx="585216" cy="475488"/>
-          </a:xfrm>
-          <a:prstGeom prst="rect">
-            <a:avLst/>
-          </a:prstGeom>
-          <a:extLst>
-            <a:ext uri="{C572A759-6A51-4108-AA02-DFA0A04FC94B}">
-              <ma14:wrappingTextBoxFlag xmlns:ma14="http://schemas.microsoft.com/office/mac/drawingml/2011/main" val="0"/>
-            </a:ext>
-          </a:extLst>
-        </p:spPr>
-        <p:txBody>
-          <a:bodyPr/>
-          <a:lstStyle>
-            <a:lvl1pPr>
-              <a:defRPr sz="2000">
-                <a:solidFill>
-                  <a:srgbClr val="FFFFFF"/>
-                </a:solidFill>
-                <a:latin typeface="Calibri"/>
-                <a:ea typeface="Calibri"/>
-                <a:cs typeface="Calibri"/>
-              </a:defRPr>
-            </a:lvl1pPr>
-          </a:lstStyle>
-          <a:p>
-            <a:pPr algn="ctr"/>
-            <a:fld id="{F7021451-1387-4CA6-816F-3879F97B5CBC}" type="slidenum">
-              <a:rPr b="1" lang="en-US"/>
-              <a:t>50</a:t>
+              <a:t>53</a:t>
             </a:fld>
             <a:endParaRPr lang="en-US"/>
           </a:p>
